--- a/ToolpathLab-开发过程与功能介绍.pptx
+++ b/ToolpathLab-开发过程与功能介绍.pptx
@@ -25,6 +25,7 @@
     <p:sldId id="273" r:id="rId24"/>
     <p:sldId id="274" r:id="rId25"/>
     <p:sldId id="275" r:id="rId26"/>
+    <p:sldId id="276" r:id="rId27"/>
   </p:sldIdLst>
   <p:sldSz cx="12191695" cy="6858000" type="screen4x3"/>
   <p:notesSz cx="6858000" cy="9144000"/>
@@ -6545,7 +6546,7 @@
                 </a:solidFill>
                 <a:latin typeface="微软雅黑"/>
               </a:rPr>
-              <a:t>四、修复：斜面刀路被画在基准平面上</a:t>
+              <a:t>四、功能：切削仿真——毛坯随刀具消失</a:t>
             </a:r>
           </a:p>
         </p:txBody>
@@ -6584,21 +6585,45 @@
                 </a:solidFill>
                 <a:latin typeface="微软雅黑"/>
               </a:rPr>
-              <a:t>用户看得见、Python 测试看不见的问题——所以补了一层前端几何自检</a:t>
-            </a:r>
-          </a:p>
-        </p:txBody>
-      </p:sp>
-      <p:sp>
-        <p:nvSpPr>
-          <p:cNvPr id="8" name="TextBox 7"/>
+              <a:t>2.5D 高度场：刀具扫过哪里，哪里的料就没了；走完刀路剩下区域形状</a:t>
+            </a:r>
+          </a:p>
+        </p:txBody>
+      </p:sp>
+      <p:pic>
+        <p:nvPicPr>
+          <p:cNvPr id="8" name="Picture 7" descr="stock-simulation.png"/>
+          <p:cNvPicPr>
+            <a:picLocks noChangeAspect="1"/>
+          </p:cNvPicPr>
+          <p:nvPr/>
+        </p:nvPicPr>
+        <p:blipFill>
+          <a:blip r:embed="rId2"/>
+          <a:stretch>
+            <a:fillRect/>
+          </a:stretch>
+        </p:blipFill>
+        <p:spPr>
+          <a:xfrm>
+            <a:off x="2275332" y="1645920"/>
+            <a:ext cx="4136136" cy="4206240"/>
+          </a:xfrm>
+          <a:prstGeom prst="rect">
+            <a:avLst/>
+          </a:prstGeom>
+        </p:spPr>
+      </p:pic>
+      <p:sp>
+        <p:nvSpPr>
+          <p:cNvPr id="9" name="TextBox 8"/>
           <p:cNvSpPr txBox="1"/>
           <p:nvPr/>
         </p:nvSpPr>
         <p:spPr>
           <a:xfrm>
-            <a:off x="777240" y="1828800"/>
-            <a:ext cx="6675120" cy="4297680"/>
+            <a:off x="640080" y="5907023"/>
+            <a:ext cx="7406640" cy="320040"/>
           </a:xfrm>
           <a:prstGeom prst="rect">
             <a:avLst/>
@@ -6611,83 +6636,122 @@
           </a:bodyPr>
           <a:lstStyle/>
           <a:p>
+            <a:pPr algn="ctr">
+              <a:spcAft>
+                <a:spcPts val="0"/>
+              </a:spcAft>
+            </a:pPr>
+            <a:r>
+              <a:rPr sz="1000" b="0">
+                <a:solidFill>
+                  <a:srgbClr val="566666"/>
+                </a:solidFill>
+                <a:latin typeface="微软雅黑"/>
+              </a:rPr>
+              <a:t>上：方形（平底刀）／下：30° 斜坡（球头刀）；左俯视残留量、右中线剖面</a:t>
+            </a:r>
+          </a:p>
+        </p:txBody>
+      </p:sp>
+      <p:sp>
+        <p:nvSpPr>
+          <p:cNvPr id="10" name="TextBox 9"/>
+          <p:cNvSpPr txBox="1"/>
+          <p:nvPr/>
+        </p:nvSpPr>
+        <p:spPr>
+          <a:xfrm>
+            <a:off x="8138160" y="1828800"/>
+            <a:ext cx="3429000" cy="4297680"/>
+          </a:xfrm>
+          <a:prstGeom prst="rect">
+            <a:avLst/>
+          </a:prstGeom>
+          <a:noFill/>
+        </p:spPr>
+        <p:txBody>
+          <a:bodyPr wrap="square">
+            <a:spAutoFit/>
+          </a:bodyPr>
+          <a:lstStyle/>
+          <a:p>
             <a:pPr algn="l">
               <a:spcAft>
-                <a:spcPts val="1100"/>
-              </a:spcAft>
-            </a:pPr>
-            <a:r>
-              <a:rPr sz="1350" b="1">
+                <a:spcPts val="900"/>
+              </a:spcAft>
+            </a:pPr>
+            <a:r>
+              <a:rPr sz="1220" b="1">
                 <a:solidFill>
                   <a:srgbClr val="142A2E"/>
                 </a:solidFill>
                 <a:latin typeface="微软雅黑"/>
               </a:rPr>
-              <a:t>·  现象：轮廓贴着斜面，刀路却横在基准平面上</a:t>
+              <a:t>·  网格铺满毛坯投影，每个节点记当前顶面高度</a:t>
             </a:r>
           </a:p>
           <a:p>
             <a:pPr algn="l">
               <a:spcAft>
-                <a:spcPts val="1100"/>
-              </a:spcAft>
-            </a:pPr>
-            <a:r>
-              <a:rPr sz="1350" b="0">
+                <a:spcPts val="900"/>
+              </a:spcAft>
+            </a:pPr>
+            <a:r>
+              <a:rPr sz="1220" b="0">
                 <a:solidFill>
                   <a:srgbClr val="142A2E"/>
                 </a:solidFill>
                 <a:latin typeface="微软雅黑"/>
               </a:rPr>
-              <a:t>·  根因：liftPaths() 本意是加 0.05 mm 抬升躲 z-fighting，却把真实 Z 替换成了抬升常量</a:t>
+              <a:t>·  刀具推进时把刀盘内节点压到刀面在该半径处的高度</a:t>
             </a:r>
           </a:p>
           <a:p>
             <a:pPr algn="l">
               <a:spcAft>
-                <a:spcPts val="1100"/>
-              </a:spcAft>
-            </a:pPr>
-            <a:r>
-              <a:rPr sz="1350" b="0">
+                <a:spcPts val="900"/>
+              </a:spcAft>
+            </a:pPr>
+            <a:r>
+              <a:rPr sz="1220" b="0">
                 <a:solidFill>
                   <a:srgbClr val="142A2E"/>
                 </a:solidFill>
                 <a:latin typeface="微软雅黑"/>
               </a:rPr>
-              <a:t>·  线索：轮廓用的是「真实 Z + 抬升」，两条路径不一致</a:t>
+              <a:t>·  刀面按刀具类型给：平底等高 / 圆鼻先平后圆角 / 球头是球面</a:t>
             </a:r>
           </a:p>
           <a:p>
             <a:pPr algn="l">
               <a:spcAft>
-                <a:spcPts val="1100"/>
-              </a:spcAft>
-            </a:pPr>
-            <a:r>
-              <a:rPr sz="1350" b="1">
+                <a:spcPts val="900"/>
+              </a:spcAft>
+            </a:pPr>
+            <a:r>
+              <a:rPr sz="1220" b="0">
                 <a:solidFill>
                   <a:srgbClr val="142A2E"/>
                 </a:solidFill>
                 <a:latin typeface="微软雅黑"/>
               </a:rPr>
-              <a:t>·  修复：改成在真实 Z 上加抬升量（平面区域表现不变）</a:t>
+              <a:t>·  快移不切料；回拖进度条从头重放；停止回到未切削毛坯</a:t>
             </a:r>
           </a:p>
           <a:p>
             <a:pPr algn="l">
               <a:spcAft>
-                <a:spcPts val="1100"/>
-              </a:spcAft>
-            </a:pPr>
-            <a:r>
-              <a:rPr sz="1350" b="0">
+                <a:spcPts val="900"/>
+              </a:spcAft>
+            </a:pPr>
+            <a:r>
+              <a:rPr sz="1220" b="0">
                 <a:solidFill>
                   <a:srgbClr val="142A2E"/>
                 </a:solidFill>
                 <a:latin typeface="微软雅黑"/>
               </a:rPr>
-              <a:t>·  加固：新增 13 项前端几何自检，并把 bug 注入回去验证脚本会报错</a:t>
+              <a:t>·  内部 3136/3136 个节点走完都到加工面，残留只在刀具够不到的边界带</a:t>
             </a:r>
           </a:p>
         </p:txBody>
@@ -6910,7 +6974,7 @@
                 </a:solidFill>
                 <a:latin typeface="微软雅黑"/>
               </a:rPr>
-              <a:t>四、修复：平顶之上的毛坯</a:t>
+              <a:t>四、修复：斜面刀路被画在基准平面上</a:t>
             </a:r>
           </a:p>
         </p:txBody>
@@ -6949,7 +7013,7 @@
                 </a:solidFill>
                 <a:latin typeface="微软雅黑"/>
               </a:rPr>
-              <a:t>「只加工斜面段」时精加工到不了平顶，那 2 mm 料就整整齐齐留在平顶上</a:t>
+              <a:t>用户看得见、Python 测试看不见的问题——所以补了一层前端几何自检</a:t>
             </a:r>
           </a:p>
         </p:txBody>
@@ -6988,7 +7052,7 @@
                 </a:solidFill>
                 <a:latin typeface="微软雅黑"/>
               </a:rPr>
-              <a:t>·  现象：零件没做完——平顶上留着一层与余量同厚的料</a:t>
+              <a:t>·  现象：轮廓贴着斜面，刀路却横在基准平面上</a:t>
             </a:r>
           </a:p>
           <a:p>
@@ -7004,7 +7068,7 @@
                 </a:solidFill>
                 <a:latin typeface="微软雅黑"/>
               </a:rPr>
-              <a:t>·  原因一（范围）：该层只返回斜面段的范围，平顶那一块 XY 根本不在刀路里</a:t>
+              <a:t>·  根因：liftPaths() 本意是加 0.05 mm 抬升躲 z-fighting，却把真实 Z 替换成了抬升常量</a:t>
             </a:r>
           </a:p>
           <a:p>
@@ -7020,7 +7084,7 @@
                 </a:solidFill>
                 <a:latin typeface="微软雅黑"/>
               </a:rPr>
-              <a:t>·  原因二（层高）：层是 82 / 62 / 42 / 22，没有一层正好落在平顶高度 80——在 82 切是削空气</a:t>
+              <a:t>·  线索：轮廓用的是「真实 Z + 抬升」，两条路径不一致</a:t>
             </a:r>
           </a:p>
           <a:p>
@@ -7036,7 +7100,7 @@
                 </a:solidFill>
                 <a:latin typeface="微软雅黑"/>
               </a:rPr>
-              <a:t>·  修复：区域报出平台高度，层里补上 80 这一层，且该层覆盖整个区域</a:t>
+              <a:t>·  修复：改成在真实 Z 上加抬升量（平面区域表现不变）</a:t>
             </a:r>
           </a:p>
           <a:p>
@@ -7052,130 +7116,7 @@
                 </a:solidFill>
                 <a:latin typeface="微软雅黑"/>
               </a:rPr>
-              <a:t>·  毛坯顶部余量为 0、或勾选「加工平顶」时都不补这一层</a:t>
-            </a:r>
-          </a:p>
-        </p:txBody>
-      </p:sp>
-      <p:sp>
-        <p:nvSpPr>
-          <p:cNvPr id="9" name="Rounded Rectangle 8"/>
-          <p:cNvSpPr/>
-          <p:nvPr/>
-        </p:nvSpPr>
-        <p:spPr>
-          <a:xfrm>
-            <a:off x="7680960" y="1828800"/>
-            <a:ext cx="3886200" cy="1920240"/>
-          </a:xfrm>
-          <a:prstGeom prst="roundRect">
-            <a:avLst/>
-          </a:prstGeom>
-          <a:solidFill>
-            <a:srgbClr val="E4F2F0"/>
-          </a:solidFill>
-          <a:ln w="12700">
-            <a:solidFill>
-              <a:srgbClr val="0E6B62"/>
-            </a:solidFill>
-          </a:ln>
-          <a:effectLst/>
-        </p:spPr>
-        <p:style>
-          <a:lnRef idx="1">
-            <a:schemeClr val="accent1"/>
-          </a:lnRef>
-          <a:fillRef idx="3">
-            <a:schemeClr val="accent1"/>
-          </a:fillRef>
-          <a:effectRef idx="2">
-            <a:schemeClr val="accent1"/>
-          </a:effectRef>
-          <a:fontRef idx="minor">
-            <a:schemeClr val="lt1"/>
-          </a:fontRef>
-        </p:style>
-        <p:txBody>
-          <a:bodyPr rtlCol="0" anchor="ctr" wrap="square" lIns="164592" tIns="109728"/>
-          <a:lstStyle/>
-          <a:p>
-            <a:pPr algn="ctr">
-              <a:spcAft>
-                <a:spcPts val="500"/>
-              </a:spcAft>
-            </a:pPr>
-            <a:r>
-              <a:rPr sz="1500" b="1">
-                <a:solidFill>
-                  <a:srgbClr val="0E6B62"/>
-                </a:solidFill>
-                <a:latin typeface="微软雅黑"/>
-              </a:rPr>
-              <a:t>修复前后的实测对比</a:t>
-            </a:r>
-          </a:p>
-          <a:p>
-            <a:pPr>
-              <a:spcAft>
-                <a:spcPts val="500"/>
-              </a:spcAft>
-            </a:pPr>
-            <a:r>
-              <a:rPr sz="1200" b="0">
-                <a:solidFill>
-                  <a:srgbClr val="142A2E"/>
-                </a:solidFill>
-                <a:latin typeface="微软雅黑"/>
-              </a:rPr>
-              <a:t>·  默认（余量 2、不分层）：水平层刀 14 条，Z = 80，x ∈ [−37, 37]</a:t>
-            </a:r>
-          </a:p>
-          <a:p>
-            <a:pPr>
-              <a:spcAft>
-                <a:spcPts val="500"/>
-              </a:spcAft>
-            </a:pPr>
-            <a:r>
-              <a:rPr sz="1200" b="0">
-                <a:solidFill>
-                  <a:srgbClr val="142A2E"/>
-                </a:solidFill>
-                <a:latin typeface="微软雅黑"/>
-              </a:rPr>
-              <a:t>·  折痕在 x = −6.188 → 平顶那一侧也被这一层覆盖</a:t>
-            </a:r>
-          </a:p>
-          <a:p>
-            <a:pPr>
-              <a:spcAft>
-                <a:spcPts val="500"/>
-              </a:spcAft>
-            </a:pPr>
-            <a:r>
-              <a:rPr sz="1200" b="0">
-                <a:solidFill>
-                  <a:srgbClr val="142A2E"/>
-                </a:solidFill>
-                <a:latin typeface="微软雅黑"/>
-              </a:rPr>
-              <a:t>·  余量 0（对照）：水平层刀 0 条</a:t>
-            </a:r>
-          </a:p>
-          <a:p>
-            <a:pPr>
-              <a:spcAft>
-                <a:spcPts val="500"/>
-              </a:spcAft>
-            </a:pPr>
-            <a:r>
-              <a:rPr sz="1200" b="0">
-                <a:solidFill>
-                  <a:srgbClr val="142A2E"/>
-                </a:solidFill>
-                <a:latin typeface="微软雅黑"/>
-              </a:rPr>
-              <a:t>·  分层 20 mm：层 82 → 80 → 62 → 42 → 22，2 mm 那层放不下刀具已跳过并提醒</a:t>
+              <a:t>·  加固：新增 13 项前端几何自检，并把 bug 注入回去验证脚本会报错</a:t>
             </a:r>
           </a:p>
         </p:txBody>
@@ -7398,7 +7339,7 @@
                 </a:solidFill>
                 <a:latin typeface="微软雅黑"/>
               </a:rPr>
-              <a:t>五、一次做了又撤回的尝试：柱面区域</a:t>
+              <a:t>四、修复：平顶之上的毛坯</a:t>
             </a:r>
           </a:p>
         </p:txBody>
@@ -7437,45 +7378,21 @@
                 </a:solidFill>
                 <a:latin typeface="微软雅黑"/>
               </a:rPr>
-              <a:t>探索「真曲面」→ 确认方向不对 → 整块撤回，不留死抽象</a:t>
-            </a:r>
-          </a:p>
-        </p:txBody>
-      </p:sp>
-      <p:pic>
-        <p:nvPicPr>
-          <p:cNvPr id="8" name="Picture 7" descr="cylinder-region-preview.png"/>
-          <p:cNvPicPr>
-            <a:picLocks noChangeAspect="1"/>
-          </p:cNvPicPr>
-          <p:nvPr/>
-        </p:nvPicPr>
-        <p:blipFill>
-          <a:blip r:embed="rId2"/>
-          <a:stretch>
-            <a:fillRect/>
-          </a:stretch>
-        </p:blipFill>
-        <p:spPr>
-          <a:xfrm>
-            <a:off x="640080" y="1645920"/>
-            <a:ext cx="7406640" cy="2324259"/>
-          </a:xfrm>
-          <a:prstGeom prst="rect">
-            <a:avLst/>
-          </a:prstGeom>
-        </p:spPr>
-      </p:pic>
-      <p:sp>
-        <p:nvSpPr>
-          <p:cNvPr id="9" name="TextBox 8"/>
+              <a:t>「只加工斜面段」时精加工到不了平顶，那 2 mm 料就整整齐齐留在平顶上</a:t>
+            </a:r>
+          </a:p>
+        </p:txBody>
+      </p:sp>
+      <p:sp>
+        <p:nvSpPr>
+          <p:cNvPr id="8" name="TextBox 7"/>
           <p:cNvSpPr txBox="1"/>
           <p:nvPr/>
         </p:nvSpPr>
         <p:spPr>
           <a:xfrm>
-            <a:off x="640080" y="4025043"/>
-            <a:ext cx="7406640" cy="320040"/>
+            <a:off x="777240" y="1828800"/>
+            <a:ext cx="6675120" cy="4297680"/>
           </a:xfrm>
           <a:prstGeom prst="rect">
             <a:avLst/>
@@ -7488,138 +7405,206 @@
           </a:bodyPr>
           <a:lstStyle/>
           <a:p>
+            <a:pPr algn="l">
+              <a:spcAft>
+                <a:spcPts val="1100"/>
+              </a:spcAft>
+            </a:pPr>
+            <a:r>
+              <a:rPr sz="1350" b="1">
+                <a:solidFill>
+                  <a:srgbClr val="142A2E"/>
+                </a:solidFill>
+                <a:latin typeface="微软雅黑"/>
+              </a:rPr>
+              <a:t>·  现象：零件没做完——平顶上留着一层与余量同厚的料</a:t>
+            </a:r>
+          </a:p>
+          <a:p>
+            <a:pPr algn="l">
+              <a:spcAft>
+                <a:spcPts val="1100"/>
+              </a:spcAft>
+            </a:pPr>
+            <a:r>
+              <a:rPr sz="1350" b="0">
+                <a:solidFill>
+                  <a:srgbClr val="142A2E"/>
+                </a:solidFill>
+                <a:latin typeface="微软雅黑"/>
+              </a:rPr>
+              <a:t>·  原因一（范围）：该层只返回斜面段的范围，平顶那一块 XY 根本不在刀路里</a:t>
+            </a:r>
+          </a:p>
+          <a:p>
+            <a:pPr algn="l">
+              <a:spcAft>
+                <a:spcPts val="1100"/>
+              </a:spcAft>
+            </a:pPr>
+            <a:r>
+              <a:rPr sz="1350" b="0">
+                <a:solidFill>
+                  <a:srgbClr val="142A2E"/>
+                </a:solidFill>
+                <a:latin typeface="微软雅黑"/>
+              </a:rPr>
+              <a:t>·  原因二（层高）：层是 82 / 62 / 42 / 22，没有一层正好落在平顶高度 80——在 82 切是削空气</a:t>
+            </a:r>
+          </a:p>
+          <a:p>
+            <a:pPr algn="l">
+              <a:spcAft>
+                <a:spcPts val="1100"/>
+              </a:spcAft>
+            </a:pPr>
+            <a:r>
+              <a:rPr sz="1350" b="1">
+                <a:solidFill>
+                  <a:srgbClr val="142A2E"/>
+                </a:solidFill>
+                <a:latin typeface="微软雅黑"/>
+              </a:rPr>
+              <a:t>·  修复：区域报出平台高度，层里补上 80 这一层，且该层覆盖整个区域</a:t>
+            </a:r>
+          </a:p>
+          <a:p>
+            <a:pPr algn="l">
+              <a:spcAft>
+                <a:spcPts val="1100"/>
+              </a:spcAft>
+            </a:pPr>
+            <a:r>
+              <a:rPr sz="1350" b="0">
+                <a:solidFill>
+                  <a:srgbClr val="142A2E"/>
+                </a:solidFill>
+                <a:latin typeface="微软雅黑"/>
+              </a:rPr>
+              <a:t>·  毛坯顶部余量为 0、或勾选「加工平顶」时都不补这一层</a:t>
+            </a:r>
+          </a:p>
+        </p:txBody>
+      </p:sp>
+      <p:sp>
+        <p:nvSpPr>
+          <p:cNvPr id="9" name="Rounded Rectangle 8"/>
+          <p:cNvSpPr/>
+          <p:nvPr/>
+        </p:nvSpPr>
+        <p:spPr>
+          <a:xfrm>
+            <a:off x="7680960" y="1828800"/>
+            <a:ext cx="3886200" cy="1920240"/>
+          </a:xfrm>
+          <a:prstGeom prst="roundRect">
+            <a:avLst/>
+          </a:prstGeom>
+          <a:solidFill>
+            <a:srgbClr val="E4F2F0"/>
+          </a:solidFill>
+          <a:ln w="12700">
+            <a:solidFill>
+              <a:srgbClr val="0E6B62"/>
+            </a:solidFill>
+          </a:ln>
+          <a:effectLst/>
+        </p:spPr>
+        <p:style>
+          <a:lnRef idx="1">
+            <a:schemeClr val="accent1"/>
+          </a:lnRef>
+          <a:fillRef idx="3">
+            <a:schemeClr val="accent1"/>
+          </a:fillRef>
+          <a:effectRef idx="2">
+            <a:schemeClr val="accent1"/>
+          </a:effectRef>
+          <a:fontRef idx="minor">
+            <a:schemeClr val="lt1"/>
+          </a:fontRef>
+        </p:style>
+        <p:txBody>
+          <a:bodyPr rtlCol="0" anchor="ctr" wrap="square" lIns="164592" tIns="109728"/>
+          <a:lstStyle/>
+          <a:p>
             <a:pPr algn="ctr">
               <a:spcAft>
-                <a:spcPts val="0"/>
-              </a:spcAft>
-            </a:pPr>
-            <a:r>
-              <a:rPr sz="1000" b="0">
-                <a:solidFill>
-                  <a:srgbClr val="566666"/>
-                </a:solidFill>
-                <a:latin typeface="微软雅黑"/>
-              </a:rPr>
-              <a:t>已撤回的柱面区域（存档图）：左剖面、右俯视</a:t>
-            </a:r>
-          </a:p>
-        </p:txBody>
-      </p:sp>
-      <p:sp>
-        <p:nvSpPr>
-          <p:cNvPr id="10" name="TextBox 9"/>
-          <p:cNvSpPr txBox="1"/>
-          <p:nvPr/>
-        </p:nvSpPr>
-        <p:spPr>
-          <a:xfrm>
-            <a:off x="8138160" y="1828800"/>
-            <a:ext cx="3429000" cy="4297680"/>
-          </a:xfrm>
-          <a:prstGeom prst="rect">
-            <a:avLst/>
-          </a:prstGeom>
-          <a:noFill/>
-        </p:spPr>
-        <p:txBody>
-          <a:bodyPr wrap="square">
-            <a:spAutoFit/>
-          </a:bodyPr>
-          <a:lstStyle/>
-          <a:p>
-            <a:pPr algn="l">
-              <a:spcAft>
-                <a:spcPts val="900"/>
-              </a:spcAft>
-            </a:pPr>
-            <a:r>
-              <a:rPr sz="1220" b="1">
+                <a:spcPts val="500"/>
+              </a:spcAft>
+            </a:pPr>
+            <a:r>
+              <a:rPr sz="1500" b="1">
+                <a:solidFill>
+                  <a:srgbClr val="0E6B62"/>
+                </a:solidFill>
+                <a:latin typeface="微软雅黑"/>
+              </a:rPr>
+              <a:t>修复前后的实测对比</a:t>
+            </a:r>
+          </a:p>
+          <a:p>
+            <a:pPr>
+              <a:spcAft>
+                <a:spcPts val="500"/>
+              </a:spcAft>
+            </a:pPr>
+            <a:r>
+              <a:rPr sz="1200" b="0">
                 <a:solidFill>
                   <a:srgbClr val="142A2E"/>
                 </a:solidFill>
                 <a:latin typeface="微软雅黑"/>
               </a:rPr>
-              <a:t>·  做了什么：加工面是沿 Y 轴扫掠的圆柱面</a:t>
-            </a:r>
-          </a:p>
-          <a:p>
-            <a:pPr algn="l">
-              <a:spcAft>
-                <a:spcPts val="900"/>
-              </a:spcAft>
-            </a:pPr>
-            <a:r>
-              <a:rPr sz="1220" b="0">
+              <a:t>·  默认（余量 2、不分层）：水平层刀 14 条，Z = 80，x ∈ [−37, 37]</a:t>
+            </a:r>
+          </a:p>
+          <a:p>
+            <a:pPr>
+              <a:spcAft>
+                <a:spcPts val="500"/>
+              </a:spcAft>
+            </a:pPr>
+            <a:r>
+              <a:rPr sz="1200" b="0">
                 <a:solidFill>
                   <a:srgbClr val="142A2E"/>
                 </a:solidFill>
                 <a:latin typeface="微软雅黑"/>
               </a:rPr>
-              <a:t>·  区域声明曲面采样步长，刀路沿折线加密贴合曲面</a:t>
-            </a:r>
-          </a:p>
-          <a:p>
-            <a:pPr algn="l">
-              <a:spcAft>
-                <a:spcPts val="900"/>
-              </a:spcAft>
-            </a:pPr>
-            <a:r>
-              <a:rPr sz="1220" b="0">
+              <a:t>·  折痕在 x = −6.188 → 平顶那一侧也被这一层覆盖</a:t>
+            </a:r>
+          </a:p>
+          <a:p>
+            <a:pPr>
+              <a:spcAft>
+                <a:spcPts val="500"/>
+              </a:spcAft>
+            </a:pPr>
+            <a:r>
+              <a:rPr sz="1200" b="0">
                 <a:solidFill>
                   <a:srgbClr val="142A2E"/>
                 </a:solidFill>
                 <a:latin typeface="微软雅黑"/>
               </a:rPr>
-              <a:t>·  三维顶面改由前端用一条母线扫掠生成</a:t>
-            </a:r>
-          </a:p>
-          <a:p>
-            <a:pPr algn="l">
-              <a:spcAft>
-                <a:spcPts val="900"/>
-              </a:spcAft>
-            </a:pPr>
-            <a:r>
-              <a:rPr sz="1220" b="1">
+              <a:t>·  余量 0（对照）：水平层刀 0 条</a:t>
+            </a:r>
+          </a:p>
+          <a:p>
+            <a:pPr>
+              <a:spcAft>
+                <a:spcPts val="500"/>
+              </a:spcAft>
+            </a:pPr>
+            <a:r>
+              <a:rPr sz="1200" b="0">
                 <a:solidFill>
                   <a:srgbClr val="142A2E"/>
                 </a:solidFill>
                 <a:latin typeface="微软雅黑"/>
               </a:rPr>
-              <a:t>·  顺手修掉的真问题：横移安全面原先只看快移两端点，柱面的拱顶落在刀路中间时会被穿过去（实测低 17.5 mm）</a:t>
-            </a:r>
-          </a:p>
-          <a:p>
-            <a:pPr algn="l">
-              <a:spcAft>
-                <a:spcPts val="900"/>
-              </a:spcAft>
-            </a:pPr>
-            <a:r>
-              <a:rPr sz="1220" b="0">
-                <a:solidFill>
-                  <a:srgbClr val="142A2E"/>
-                </a:solidFill>
-                <a:latin typeface="微软雅黑"/>
-              </a:rPr>
-              <a:t>·  撤回时连同只为它服务的曲面加密、解析最高点钩子、母线扫掠显示一起删掉</a:t>
-            </a:r>
-          </a:p>
-          <a:p>
-            <a:pPr algn="l">
-              <a:spcAft>
-                <a:spcPts val="900"/>
-              </a:spcAft>
-            </a:pPr>
-            <a:r>
-              <a:rPr sz="1220" b="0">
-                <a:solidFill>
-                  <a:srgbClr val="142A2E"/>
-                </a:solidFill>
-                <a:latin typeface="微软雅黑"/>
-              </a:rPr>
-              <a:t>·  留下的长期资产只有一条经验：安全面要按路径最高点算</a:t>
+              <a:t>·  分层 20 mm：层 82 → 80 → 62 → 42 → 22，2 mm 那层放不下刀具已跳过并提醒</a:t>
             </a:r>
           </a:p>
         </p:txBody>
@@ -7721,6 +7706,450 @@
                 <a:latin typeface="微软雅黑"/>
               </a:rPr>
               <a:t>18</a:t>
+            </a:r>
+          </a:p>
+        </p:txBody>
+      </p:sp>
+      <p:sp>
+        <p:nvSpPr>
+          <p:cNvPr id="4" name="TextBox 3"/>
+          <p:cNvSpPr txBox="1"/>
+          <p:nvPr/>
+        </p:nvSpPr>
+        <p:spPr>
+          <a:xfrm>
+            <a:off x="713232" y="6355080"/>
+            <a:ext cx="5486400" cy="320040"/>
+          </a:xfrm>
+          <a:prstGeom prst="rect">
+            <a:avLst/>
+          </a:prstGeom>
+          <a:noFill/>
+        </p:spPr>
+        <p:txBody>
+          <a:bodyPr wrap="square">
+            <a:spAutoFit/>
+          </a:bodyPr>
+          <a:lstStyle/>
+          <a:p>
+            <a:pPr algn="l">
+              <a:spcAft>
+                <a:spcPts val="800"/>
+              </a:spcAft>
+            </a:pPr>
+            <a:r>
+              <a:rPr sz="1000" b="0">
+                <a:solidFill>
+                  <a:srgbClr val="566666"/>
+                </a:solidFill>
+                <a:latin typeface="微软雅黑"/>
+              </a:rPr>
+              <a:t>ToolpathLab · 功能开发记录</a:t>
+            </a:r>
+          </a:p>
+        </p:txBody>
+      </p:sp>
+      <p:sp>
+        <p:nvSpPr>
+          <p:cNvPr id="5" name="Rectangle 4"/>
+          <p:cNvSpPr/>
+          <p:nvPr/>
+        </p:nvSpPr>
+        <p:spPr>
+          <a:xfrm>
+            <a:off x="0" y="0"/>
+            <a:ext cx="164592" cy="6858000"/>
+          </a:xfrm>
+          <a:prstGeom prst="rect">
+            <a:avLst/>
+          </a:prstGeom>
+          <a:solidFill>
+            <a:srgbClr val="0E6B62"/>
+          </a:solidFill>
+          <a:ln>
+            <a:noFill/>
+          </a:ln>
+          <a:effectLst/>
+        </p:spPr>
+        <p:style>
+          <a:lnRef idx="1">
+            <a:schemeClr val="accent1"/>
+          </a:lnRef>
+          <a:fillRef idx="3">
+            <a:schemeClr val="accent1"/>
+          </a:fillRef>
+          <a:effectRef idx="2">
+            <a:schemeClr val="accent1"/>
+          </a:effectRef>
+          <a:fontRef idx="minor">
+            <a:schemeClr val="lt1"/>
+          </a:fontRef>
+        </p:style>
+        <p:txBody>
+          <a:bodyPr rtlCol="0" anchor="ctr"/>
+          <a:lstStyle/>
+          <a:p>
+            <a:pPr algn="ctr"/>
+          </a:p>
+        </p:txBody>
+      </p:sp>
+      <p:sp>
+        <p:nvSpPr>
+          <p:cNvPr id="6" name="TextBox 5"/>
+          <p:cNvSpPr txBox="1"/>
+          <p:nvPr/>
+        </p:nvSpPr>
+        <p:spPr>
+          <a:xfrm>
+            <a:off x="685800" y="384048"/>
+            <a:ext cx="10789920" cy="822960"/>
+          </a:xfrm>
+          <a:prstGeom prst="rect">
+            <a:avLst/>
+          </a:prstGeom>
+          <a:noFill/>
+        </p:spPr>
+        <p:txBody>
+          <a:bodyPr wrap="square">
+            <a:spAutoFit/>
+          </a:bodyPr>
+          <a:lstStyle/>
+          <a:p>
+            <a:pPr algn="l">
+              <a:spcAft>
+                <a:spcPts val="200"/>
+              </a:spcAft>
+            </a:pPr>
+            <a:r>
+              <a:rPr sz="2700" b="1">
+                <a:solidFill>
+                  <a:srgbClr val="142A2E"/>
+                </a:solidFill>
+                <a:latin typeface="微软雅黑"/>
+              </a:rPr>
+              <a:t>五、一次做了又撤回的尝试：柱面区域</a:t>
+            </a:r>
+          </a:p>
+        </p:txBody>
+      </p:sp>
+      <p:sp>
+        <p:nvSpPr>
+          <p:cNvPr id="7" name="TextBox 6"/>
+          <p:cNvSpPr txBox="1"/>
+          <p:nvPr/>
+        </p:nvSpPr>
+        <p:spPr>
+          <a:xfrm>
+            <a:off x="713232" y="1133856"/>
+            <a:ext cx="10881360" cy="457200"/>
+          </a:xfrm>
+          <a:prstGeom prst="rect">
+            <a:avLst/>
+          </a:prstGeom>
+          <a:noFill/>
+        </p:spPr>
+        <p:txBody>
+          <a:bodyPr wrap="square">
+            <a:spAutoFit/>
+          </a:bodyPr>
+          <a:lstStyle/>
+          <a:p>
+            <a:pPr algn="l">
+              <a:spcAft>
+                <a:spcPts val="0"/>
+              </a:spcAft>
+            </a:pPr>
+            <a:r>
+              <a:rPr sz="1250" b="0">
+                <a:solidFill>
+                  <a:srgbClr val="566666"/>
+                </a:solidFill>
+                <a:latin typeface="微软雅黑"/>
+              </a:rPr>
+              <a:t>探索「真曲面」→ 确认方向不对 → 整块撤回，不留死抽象</a:t>
+            </a:r>
+          </a:p>
+        </p:txBody>
+      </p:sp>
+      <p:pic>
+        <p:nvPicPr>
+          <p:cNvPr id="8" name="Picture 7" descr="cylinder-region-preview.png"/>
+          <p:cNvPicPr>
+            <a:picLocks noChangeAspect="1"/>
+          </p:cNvPicPr>
+          <p:nvPr/>
+        </p:nvPicPr>
+        <p:blipFill>
+          <a:blip r:embed="rId2"/>
+          <a:stretch>
+            <a:fillRect/>
+          </a:stretch>
+        </p:blipFill>
+        <p:spPr>
+          <a:xfrm>
+            <a:off x="640080" y="1645920"/>
+            <a:ext cx="7406640" cy="2324259"/>
+          </a:xfrm>
+          <a:prstGeom prst="rect">
+            <a:avLst/>
+          </a:prstGeom>
+        </p:spPr>
+      </p:pic>
+      <p:sp>
+        <p:nvSpPr>
+          <p:cNvPr id="9" name="TextBox 8"/>
+          <p:cNvSpPr txBox="1"/>
+          <p:nvPr/>
+        </p:nvSpPr>
+        <p:spPr>
+          <a:xfrm>
+            <a:off x="640080" y="4025043"/>
+            <a:ext cx="7406640" cy="320040"/>
+          </a:xfrm>
+          <a:prstGeom prst="rect">
+            <a:avLst/>
+          </a:prstGeom>
+          <a:noFill/>
+        </p:spPr>
+        <p:txBody>
+          <a:bodyPr wrap="square">
+            <a:spAutoFit/>
+          </a:bodyPr>
+          <a:lstStyle/>
+          <a:p>
+            <a:pPr algn="ctr">
+              <a:spcAft>
+                <a:spcPts val="0"/>
+              </a:spcAft>
+            </a:pPr>
+            <a:r>
+              <a:rPr sz="1000" b="0">
+                <a:solidFill>
+                  <a:srgbClr val="566666"/>
+                </a:solidFill>
+                <a:latin typeface="微软雅黑"/>
+              </a:rPr>
+              <a:t>已撤回的柱面区域（存档图）：左剖面、右俯视</a:t>
+            </a:r>
+          </a:p>
+        </p:txBody>
+      </p:sp>
+      <p:sp>
+        <p:nvSpPr>
+          <p:cNvPr id="10" name="TextBox 9"/>
+          <p:cNvSpPr txBox="1"/>
+          <p:nvPr/>
+        </p:nvSpPr>
+        <p:spPr>
+          <a:xfrm>
+            <a:off x="8138160" y="1828800"/>
+            <a:ext cx="3429000" cy="4297680"/>
+          </a:xfrm>
+          <a:prstGeom prst="rect">
+            <a:avLst/>
+          </a:prstGeom>
+          <a:noFill/>
+        </p:spPr>
+        <p:txBody>
+          <a:bodyPr wrap="square">
+            <a:spAutoFit/>
+          </a:bodyPr>
+          <a:lstStyle/>
+          <a:p>
+            <a:pPr algn="l">
+              <a:spcAft>
+                <a:spcPts val="900"/>
+              </a:spcAft>
+            </a:pPr>
+            <a:r>
+              <a:rPr sz="1220" b="1">
+                <a:solidFill>
+                  <a:srgbClr val="142A2E"/>
+                </a:solidFill>
+                <a:latin typeface="微软雅黑"/>
+              </a:rPr>
+              <a:t>·  做了什么：加工面是沿 Y 轴扫掠的圆柱面</a:t>
+            </a:r>
+          </a:p>
+          <a:p>
+            <a:pPr algn="l">
+              <a:spcAft>
+                <a:spcPts val="900"/>
+              </a:spcAft>
+            </a:pPr>
+            <a:r>
+              <a:rPr sz="1220" b="0">
+                <a:solidFill>
+                  <a:srgbClr val="142A2E"/>
+                </a:solidFill>
+                <a:latin typeface="微软雅黑"/>
+              </a:rPr>
+              <a:t>·  区域声明曲面采样步长，刀路沿折线加密贴合曲面</a:t>
+            </a:r>
+          </a:p>
+          <a:p>
+            <a:pPr algn="l">
+              <a:spcAft>
+                <a:spcPts val="900"/>
+              </a:spcAft>
+            </a:pPr>
+            <a:r>
+              <a:rPr sz="1220" b="0">
+                <a:solidFill>
+                  <a:srgbClr val="142A2E"/>
+                </a:solidFill>
+                <a:latin typeface="微软雅黑"/>
+              </a:rPr>
+              <a:t>·  三维顶面改由前端用一条母线扫掠生成</a:t>
+            </a:r>
+          </a:p>
+          <a:p>
+            <a:pPr algn="l">
+              <a:spcAft>
+                <a:spcPts val="900"/>
+              </a:spcAft>
+            </a:pPr>
+            <a:r>
+              <a:rPr sz="1220" b="1">
+                <a:solidFill>
+                  <a:srgbClr val="142A2E"/>
+                </a:solidFill>
+                <a:latin typeface="微软雅黑"/>
+              </a:rPr>
+              <a:t>·  顺手修掉的真问题：横移安全面原先只看快移两端点，柱面的拱顶落在刀路中间时会被穿过去（实测低 17.5 mm）</a:t>
+            </a:r>
+          </a:p>
+          <a:p>
+            <a:pPr algn="l">
+              <a:spcAft>
+                <a:spcPts val="900"/>
+              </a:spcAft>
+            </a:pPr>
+            <a:r>
+              <a:rPr sz="1220" b="0">
+                <a:solidFill>
+                  <a:srgbClr val="142A2E"/>
+                </a:solidFill>
+                <a:latin typeface="微软雅黑"/>
+              </a:rPr>
+              <a:t>·  撤回时连同只为它服务的曲面加密、解析最高点钩子、母线扫掠显示一起删掉</a:t>
+            </a:r>
+          </a:p>
+          <a:p>
+            <a:pPr algn="l">
+              <a:spcAft>
+                <a:spcPts val="900"/>
+              </a:spcAft>
+            </a:pPr>
+            <a:r>
+              <a:rPr sz="1220" b="0">
+                <a:solidFill>
+                  <a:srgbClr val="142A2E"/>
+                </a:solidFill>
+                <a:latin typeface="微软雅黑"/>
+              </a:rPr>
+              <a:t>·  留下的长期资产只有一条经验：安全面要按路径最高点算</a:t>
+            </a:r>
+          </a:p>
+        </p:txBody>
+      </p:sp>
+    </p:spTree>
+  </p:cSld>
+  <p:clrMapOvr>
+    <a:masterClrMapping/>
+  </p:clrMapOvr>
+</p:sld>
+</file>
+
+<file path=ppt/slides/slide19.xml><?xml version="1.0" encoding="utf-8"?>
+<p:sld xmlns:a="http://schemas.openxmlformats.org/drawingml/2006/main" xmlns:p="http://schemas.openxmlformats.org/presentationml/2006/main" xmlns:r="http://schemas.openxmlformats.org/officeDocument/2006/relationships">
+  <p:cSld>
+    <p:spTree>
+      <p:nvGrpSpPr>
+        <p:cNvPr id="1" name=""/>
+        <p:cNvGrpSpPr/>
+        <p:nvPr/>
+      </p:nvGrpSpPr>
+      <p:grpSpPr/>
+      <p:sp>
+        <p:nvSpPr>
+          <p:cNvPr id="2" name="Rectangle 1"/>
+          <p:cNvSpPr/>
+          <p:nvPr/>
+        </p:nvSpPr>
+        <p:spPr>
+          <a:xfrm>
+            <a:off x="0" y="0"/>
+            <a:ext cx="12191695" cy="6858000"/>
+          </a:xfrm>
+          <a:prstGeom prst="rect">
+            <a:avLst/>
+          </a:prstGeom>
+          <a:solidFill>
+            <a:srgbClr val="FFFFFF"/>
+          </a:solidFill>
+          <a:ln>
+            <a:noFill/>
+          </a:ln>
+          <a:effectLst/>
+        </p:spPr>
+        <p:style>
+          <a:lnRef idx="1">
+            <a:schemeClr val="accent1"/>
+          </a:lnRef>
+          <a:fillRef idx="3">
+            <a:schemeClr val="accent1"/>
+          </a:fillRef>
+          <a:effectRef idx="2">
+            <a:schemeClr val="accent1"/>
+          </a:effectRef>
+          <a:fontRef idx="minor">
+            <a:schemeClr val="lt1"/>
+          </a:fontRef>
+        </p:style>
+        <p:txBody>
+          <a:bodyPr rtlCol="0" anchor="ctr"/>
+          <a:lstStyle/>
+          <a:p>
+            <a:pPr algn="ctr"/>
+          </a:p>
+        </p:txBody>
+      </p:sp>
+      <p:sp>
+        <p:nvSpPr>
+          <p:cNvPr id="3" name="TextBox 2"/>
+          <p:cNvSpPr txBox="1"/>
+          <p:nvPr/>
+        </p:nvSpPr>
+        <p:spPr>
+          <a:xfrm>
+            <a:off x="11247120" y="6355080"/>
+            <a:ext cx="822960" cy="320040"/>
+          </a:xfrm>
+          <a:prstGeom prst="rect">
+            <a:avLst/>
+          </a:prstGeom>
+          <a:noFill/>
+        </p:spPr>
+        <p:txBody>
+          <a:bodyPr wrap="square">
+            <a:spAutoFit/>
+          </a:bodyPr>
+          <a:lstStyle/>
+          <a:p>
+            <a:pPr algn="r">
+              <a:spcAft>
+                <a:spcPts val="800"/>
+              </a:spcAft>
+            </a:pPr>
+            <a:r>
+              <a:rPr sz="1000" b="0">
+                <a:solidFill>
+                  <a:srgbClr val="566666"/>
+                </a:solidFill>
+                <a:latin typeface="微软雅黑"/>
+              </a:rPr>
+              <a:t>19</a:t>
             </a:r>
           </a:p>
         </p:txBody>
@@ -8486,578 +8915,6 @@
 </p:sld>
 </file>
 
-<file path=ppt/slides/slide19.xml><?xml version="1.0" encoding="utf-8"?>
-<p:sld xmlns:a="http://schemas.openxmlformats.org/drawingml/2006/main" xmlns:p="http://schemas.openxmlformats.org/presentationml/2006/main" xmlns:r="http://schemas.openxmlformats.org/officeDocument/2006/relationships">
-  <p:cSld>
-    <p:spTree>
-      <p:nvGrpSpPr>
-        <p:cNvPr id="1" name=""/>
-        <p:cNvGrpSpPr/>
-        <p:nvPr/>
-      </p:nvGrpSpPr>
-      <p:grpSpPr/>
-      <p:sp>
-        <p:nvSpPr>
-          <p:cNvPr id="2" name="Rectangle 1"/>
-          <p:cNvSpPr/>
-          <p:nvPr/>
-        </p:nvSpPr>
-        <p:spPr>
-          <a:xfrm>
-            <a:off x="0" y="0"/>
-            <a:ext cx="12191695" cy="6858000"/>
-          </a:xfrm>
-          <a:prstGeom prst="rect">
-            <a:avLst/>
-          </a:prstGeom>
-          <a:solidFill>
-            <a:srgbClr val="FFFFFF"/>
-          </a:solidFill>
-          <a:ln>
-            <a:noFill/>
-          </a:ln>
-          <a:effectLst/>
-        </p:spPr>
-        <p:style>
-          <a:lnRef idx="1">
-            <a:schemeClr val="accent1"/>
-          </a:lnRef>
-          <a:fillRef idx="3">
-            <a:schemeClr val="accent1"/>
-          </a:fillRef>
-          <a:effectRef idx="2">
-            <a:schemeClr val="accent1"/>
-          </a:effectRef>
-          <a:fontRef idx="minor">
-            <a:schemeClr val="lt1"/>
-          </a:fontRef>
-        </p:style>
-        <p:txBody>
-          <a:bodyPr rtlCol="0" anchor="ctr"/>
-          <a:lstStyle/>
-          <a:p>
-            <a:pPr algn="ctr"/>
-          </a:p>
-        </p:txBody>
-      </p:sp>
-      <p:sp>
-        <p:nvSpPr>
-          <p:cNvPr id="3" name="TextBox 2"/>
-          <p:cNvSpPr txBox="1"/>
-          <p:nvPr/>
-        </p:nvSpPr>
-        <p:spPr>
-          <a:xfrm>
-            <a:off x="11247120" y="6355080"/>
-            <a:ext cx="822960" cy="320040"/>
-          </a:xfrm>
-          <a:prstGeom prst="rect">
-            <a:avLst/>
-          </a:prstGeom>
-          <a:noFill/>
-        </p:spPr>
-        <p:txBody>
-          <a:bodyPr wrap="square">
-            <a:spAutoFit/>
-          </a:bodyPr>
-          <a:lstStyle/>
-          <a:p>
-            <a:pPr algn="r">
-              <a:spcAft>
-                <a:spcPts val="800"/>
-              </a:spcAft>
-            </a:pPr>
-            <a:r>
-              <a:rPr sz="1000" b="0">
-                <a:solidFill>
-                  <a:srgbClr val="566666"/>
-                </a:solidFill>
-                <a:latin typeface="微软雅黑"/>
-              </a:rPr>
-              <a:t>19</a:t>
-            </a:r>
-          </a:p>
-        </p:txBody>
-      </p:sp>
-      <p:sp>
-        <p:nvSpPr>
-          <p:cNvPr id="4" name="TextBox 3"/>
-          <p:cNvSpPr txBox="1"/>
-          <p:nvPr/>
-        </p:nvSpPr>
-        <p:spPr>
-          <a:xfrm>
-            <a:off x="713232" y="6355080"/>
-            <a:ext cx="5486400" cy="320040"/>
-          </a:xfrm>
-          <a:prstGeom prst="rect">
-            <a:avLst/>
-          </a:prstGeom>
-          <a:noFill/>
-        </p:spPr>
-        <p:txBody>
-          <a:bodyPr wrap="square">
-            <a:spAutoFit/>
-          </a:bodyPr>
-          <a:lstStyle/>
-          <a:p>
-            <a:pPr algn="l">
-              <a:spcAft>
-                <a:spcPts val="800"/>
-              </a:spcAft>
-            </a:pPr>
-            <a:r>
-              <a:rPr sz="1000" b="0">
-                <a:solidFill>
-                  <a:srgbClr val="566666"/>
-                </a:solidFill>
-                <a:latin typeface="微软雅黑"/>
-              </a:rPr>
-              <a:t>ToolpathLab · 功能开发记录</a:t>
-            </a:r>
-          </a:p>
-        </p:txBody>
-      </p:sp>
-      <p:sp>
-        <p:nvSpPr>
-          <p:cNvPr id="5" name="Rectangle 4"/>
-          <p:cNvSpPr/>
-          <p:nvPr/>
-        </p:nvSpPr>
-        <p:spPr>
-          <a:xfrm>
-            <a:off x="0" y="0"/>
-            <a:ext cx="164592" cy="6858000"/>
-          </a:xfrm>
-          <a:prstGeom prst="rect">
-            <a:avLst/>
-          </a:prstGeom>
-          <a:solidFill>
-            <a:srgbClr val="0E6B62"/>
-          </a:solidFill>
-          <a:ln>
-            <a:noFill/>
-          </a:ln>
-          <a:effectLst/>
-        </p:spPr>
-        <p:style>
-          <a:lnRef idx="1">
-            <a:schemeClr val="accent1"/>
-          </a:lnRef>
-          <a:fillRef idx="3">
-            <a:schemeClr val="accent1"/>
-          </a:fillRef>
-          <a:effectRef idx="2">
-            <a:schemeClr val="accent1"/>
-          </a:effectRef>
-          <a:fontRef idx="minor">
-            <a:schemeClr val="lt1"/>
-          </a:fontRef>
-        </p:style>
-        <p:txBody>
-          <a:bodyPr rtlCol="0" anchor="ctr"/>
-          <a:lstStyle/>
-          <a:p>
-            <a:pPr algn="ctr"/>
-          </a:p>
-        </p:txBody>
-      </p:sp>
-      <p:sp>
-        <p:nvSpPr>
-          <p:cNvPr id="6" name="TextBox 5"/>
-          <p:cNvSpPr txBox="1"/>
-          <p:nvPr/>
-        </p:nvSpPr>
-        <p:spPr>
-          <a:xfrm>
-            <a:off x="685800" y="384048"/>
-            <a:ext cx="10789920" cy="822960"/>
-          </a:xfrm>
-          <a:prstGeom prst="rect">
-            <a:avLst/>
-          </a:prstGeom>
-          <a:noFill/>
-        </p:spPr>
-        <p:txBody>
-          <a:bodyPr wrap="square">
-            <a:spAutoFit/>
-          </a:bodyPr>
-          <a:lstStyle/>
-          <a:p>
-            <a:pPr algn="l">
-              <a:spcAft>
-                <a:spcPts val="200"/>
-              </a:spcAft>
-            </a:pPr>
-            <a:r>
-              <a:rPr sz="2700" b="1">
-                <a:solidFill>
-                  <a:srgbClr val="142A2E"/>
-                </a:solidFill>
-                <a:latin typeface="微软雅黑"/>
-              </a:rPr>
-              <a:t>七、已知限制与后续方向</a:t>
-            </a:r>
-          </a:p>
-        </p:txBody>
-      </p:sp>
-      <p:sp>
-        <p:nvSpPr>
-          <p:cNvPr id="7" name="TextBox 6"/>
-          <p:cNvSpPr txBox="1"/>
-          <p:nvPr/>
-        </p:nvSpPr>
-        <p:spPr>
-          <a:xfrm>
-            <a:off x="713232" y="1133856"/>
-            <a:ext cx="10881360" cy="457200"/>
-          </a:xfrm>
-          <a:prstGeom prst="rect">
-            <a:avLst/>
-          </a:prstGeom>
-          <a:noFill/>
-        </p:spPr>
-        <p:txBody>
-          <a:bodyPr wrap="square">
-            <a:spAutoFit/>
-          </a:bodyPr>
-          <a:lstStyle/>
-          <a:p>
-            <a:pPr algn="l">
-              <a:spcAft>
-                <a:spcPts val="0"/>
-              </a:spcAft>
-            </a:pPr>
-            <a:r>
-              <a:rPr sz="1250" b="0">
-                <a:solidFill>
-                  <a:srgbClr val="566666"/>
-                </a:solidFill>
-                <a:latin typeface="微软雅黑"/>
-              </a:rPr>
-              <a:t>如实交代边界，比夸大能力更有用</a:t>
-            </a:r>
-          </a:p>
-        </p:txBody>
-      </p:sp>
-      <p:sp>
-        <p:nvSpPr>
-          <p:cNvPr id="8" name="Rounded Rectangle 7"/>
-          <p:cNvSpPr/>
-          <p:nvPr/>
-        </p:nvSpPr>
-        <p:spPr>
-          <a:xfrm>
-            <a:off x="777240" y="1783080"/>
-            <a:ext cx="5120640" cy="4023360"/>
-          </a:xfrm>
-          <a:prstGeom prst="roundRect">
-            <a:avLst/>
-          </a:prstGeom>
-          <a:solidFill>
-            <a:srgbClr val="EEF1F1"/>
-          </a:solidFill>
-          <a:ln w="12700">
-            <a:solidFill>
-              <a:srgbClr val="566666"/>
-            </a:solidFill>
-          </a:ln>
-          <a:effectLst/>
-        </p:spPr>
-        <p:style>
-          <a:lnRef idx="1">
-            <a:schemeClr val="accent1"/>
-          </a:lnRef>
-          <a:fillRef idx="3">
-            <a:schemeClr val="accent1"/>
-          </a:fillRef>
-          <a:effectRef idx="2">
-            <a:schemeClr val="accent1"/>
-          </a:effectRef>
-          <a:fontRef idx="minor">
-            <a:schemeClr val="lt1"/>
-          </a:fontRef>
-        </p:style>
-        <p:txBody>
-          <a:bodyPr rtlCol="0" anchor="ctr" wrap="square" lIns="164592" tIns="109728"/>
-          <a:lstStyle/>
-          <a:p>
-            <a:pPr algn="ctr">
-              <a:spcAft>
-                <a:spcPts val="500"/>
-              </a:spcAft>
-            </a:pPr>
-            <a:r>
-              <a:rPr sz="1500" b="1">
-                <a:solidFill>
-                  <a:srgbClr val="566666"/>
-                </a:solidFill>
-                <a:latin typeface="微软雅黑"/>
-              </a:rPr>
-              <a:t>已知限制</a:t>
-            </a:r>
-          </a:p>
-          <a:p>
-            <a:pPr>
-              <a:spcAft>
-                <a:spcPts val="500"/>
-              </a:spcAft>
-            </a:pPr>
-            <a:r>
-              <a:rPr sz="1200" b="0">
-                <a:solidFill>
-                  <a:srgbClr val="142A2E"/>
-                </a:solidFill>
-                <a:latin typeface="微软雅黑"/>
-              </a:rPr>
-              <a:t>·  模型是 2.5D：刀轴始终竖直，平底刀在斜面上会过切（模型里不模拟这一点），球头刀与圆鼻刀没有这个问题。</a:t>
-            </a:r>
-          </a:p>
-          <a:p>
-            <a:pPr>
-              <a:spcAft>
-                <a:spcPts val="500"/>
-              </a:spcAft>
-            </a:pPr>
-            <a:r>
-              <a:rPr sz="1200" b="0">
-                <a:solidFill>
-                  <a:srgbClr val="142A2E"/>
-                </a:solidFill>
-                <a:latin typeface="微软雅黑"/>
-              </a:rPr>
-              <a:t>·  不做材料去除仿真：分层粗加工的层数、每层范围与顺序都是真的，但每层实际切多深、受力多少没有模拟。</a:t>
-            </a:r>
-          </a:p>
-          <a:p>
-            <a:pPr>
-              <a:spcAft>
-                <a:spcPts val="500"/>
-              </a:spcAft>
-            </a:pPr>
-            <a:r>
-              <a:rPr sz="1200" b="0">
-                <a:solidFill>
-                  <a:srgbClr val="142A2E"/>
-                </a:solidFill>
-                <a:latin typeface="微软雅黑"/>
-              </a:rPr>
-              <a:t>·  不计算残留高度：平面上球头刀与圆鼻刀的残留高度需要三维曲面加工模型。</a:t>
-            </a:r>
-          </a:p>
-          <a:p>
-            <a:pPr>
-              <a:spcAft>
-                <a:spcPts val="500"/>
-              </a:spcAft>
-            </a:pPr>
-            <a:r>
-              <a:rPr sz="1200" b="0">
-                <a:solidFill>
-                  <a:srgbClr val="142A2E"/>
-                </a:solidFill>
-                <a:latin typeface="微软雅黑"/>
-              </a:rPr>
-              <a:t>·  分层时层间会抬刀一次（每层是独立的进刀—走刀—抬刀），还没有“层间不抬刀”或“斜向下刀”的优化。</a:t>
-            </a:r>
-          </a:p>
-          <a:p>
-            <a:pPr>
-              <a:spcAft>
-                <a:spcPts val="500"/>
-              </a:spcAft>
-            </a:pPr>
-            <a:r>
-              <a:rPr sz="1200" b="0">
-                <a:solidFill>
-                  <a:srgbClr val="142A2E"/>
-                </a:solidFill>
-                <a:latin typeface="微软雅黑"/>
-              </a:rPr>
-              <a:t>·  毛坯目前只用于显示与分层起点的定义，不参与求交或装夹校验。</a:t>
-            </a:r>
-          </a:p>
-          <a:p>
-            <a:pPr>
-              <a:spcAft>
-                <a:spcPts val="500"/>
-              </a:spcAft>
-            </a:pPr>
-            <a:r>
-              <a:rPr sz="1200" b="0">
-                <a:solidFill>
-                  <a:srgbClr val="142A2E"/>
-                </a:solidFill>
-                <a:latin typeface="微软雅黑"/>
-              </a:rPr>
-              <a:t>·  未经真实机床验证：G-code 是标准的三轴指令，但没有在机床上跑过。</a:t>
-            </a:r>
-          </a:p>
-        </p:txBody>
-      </p:sp>
-      <p:sp>
-        <p:nvSpPr>
-          <p:cNvPr id="9" name="Rounded Rectangle 8"/>
-          <p:cNvSpPr/>
-          <p:nvPr/>
-        </p:nvSpPr>
-        <p:spPr>
-          <a:xfrm>
-            <a:off x="6263640" y="1783080"/>
-            <a:ext cx="5120640" cy="4023360"/>
-          </a:xfrm>
-          <a:prstGeom prst="roundRect">
-            <a:avLst/>
-          </a:prstGeom>
-          <a:solidFill>
-            <a:srgbClr val="E4F2F0"/>
-          </a:solidFill>
-          <a:ln w="12700">
-            <a:solidFill>
-              <a:srgbClr val="0E6B62"/>
-            </a:solidFill>
-          </a:ln>
-          <a:effectLst/>
-        </p:spPr>
-        <p:style>
-          <a:lnRef idx="1">
-            <a:schemeClr val="accent1"/>
-          </a:lnRef>
-          <a:fillRef idx="3">
-            <a:schemeClr val="accent1"/>
-          </a:fillRef>
-          <a:effectRef idx="2">
-            <a:schemeClr val="accent1"/>
-          </a:effectRef>
-          <a:fontRef idx="minor">
-            <a:schemeClr val="lt1"/>
-          </a:fontRef>
-        </p:style>
-        <p:txBody>
-          <a:bodyPr rtlCol="0" anchor="ctr" wrap="square" lIns="164592" tIns="109728"/>
-          <a:lstStyle/>
-          <a:p>
-            <a:pPr algn="ctr">
-              <a:spcAft>
-                <a:spcPts val="500"/>
-              </a:spcAft>
-            </a:pPr>
-            <a:r>
-              <a:rPr sz="1500" b="1">
-                <a:solidFill>
-                  <a:srgbClr val="0E6B62"/>
-                </a:solidFill>
-                <a:latin typeface="微软雅黑"/>
-              </a:rPr>
-              <a:t>后续可选方向</a:t>
-            </a:r>
-          </a:p>
-          <a:p>
-            <a:pPr>
-              <a:spcAft>
-                <a:spcPts val="500"/>
-              </a:spcAft>
-            </a:pPr>
-            <a:r>
-              <a:rPr sz="1200" b="0">
-                <a:solidFill>
-                  <a:srgbClr val="142A2E"/>
-                </a:solidFill>
-                <a:latin typeface="微软雅黑"/>
-              </a:rPr>
-              <a:t>·  切宽按斜面真实长度计算：现在切宽量的是 XY 投影距离，斜面上真实间距 = 切宽 / cos(斜度)。</a:t>
-            </a:r>
-          </a:p>
-          <a:p>
-            <a:pPr>
-              <a:spcAft>
-                <a:spcPts val="500"/>
-              </a:spcAft>
-            </a:pPr>
-            <a:r>
-              <a:rPr sz="1200" b="0">
-                <a:solidFill>
-                  <a:srgbClr val="142A2E"/>
-                </a:solidFill>
-                <a:latin typeface="微软雅黑"/>
-              </a:rPr>
-              <a:t>·  层间不抬刀 / 斜向下刀：斜面上用螺旋或斜线进刀代替每层垂直扎刀。</a:t>
-            </a:r>
-          </a:p>
-          <a:p>
-            <a:pPr>
-              <a:spcAft>
-                <a:spcPts val="500"/>
-              </a:spcAft>
-            </a:pPr>
-            <a:r>
-              <a:rPr sz="1200" b="0">
-                <a:solidFill>
-                  <a:srgbClr val="142A2E"/>
-                </a:solidFill>
-                <a:latin typeface="微软雅黑"/>
-              </a:rPr>
-              <a:t>·  残留高度与球头刀残留模型：需要先支持真正的三维曲面区域。</a:t>
-            </a:r>
-          </a:p>
-          <a:p>
-            <a:pPr>
-              <a:spcAft>
-                <a:spcPts val="500"/>
-              </a:spcAft>
-            </a:pPr>
-            <a:r>
-              <a:rPr sz="1200" b="0">
-                <a:solidFill>
-                  <a:srgbClr val="142A2E"/>
-                </a:solidFill>
-                <a:latin typeface="微软雅黑"/>
-              </a:rPr>
-              <a:t>·  刀具库与多把刀：一个程序里粗精加工用不同刀具。</a:t>
-            </a:r>
-          </a:p>
-          <a:p>
-            <a:pPr>
-              <a:spcAft>
-                <a:spcPts val="500"/>
-              </a:spcAft>
-            </a:pPr>
-            <a:r>
-              <a:rPr sz="1200" b="0">
-                <a:solidFill>
-                  <a:srgbClr val="142A2E"/>
-                </a:solidFill>
-                <a:latin typeface="微软雅黑"/>
-              </a:rPr>
-              <a:t>·  平台那一层只走平顶范围：目前为了清干净，它是按整个区域走的，斜面上略有冗余。</a:t>
-            </a:r>
-          </a:p>
-          <a:p>
-            <a:pPr>
-              <a:spcAft>
-                <a:spcPts val="500"/>
-              </a:spcAft>
-            </a:pPr>
-            <a:r>
-              <a:rPr sz="1200" b="0">
-                <a:solidFill>
-                  <a:srgbClr val="142A2E"/>
-                </a:solidFill>
-                <a:latin typeface="微软雅黑"/>
-              </a:rPr>
-              <a:t>·  把 office 记录（本文档与配套 PPT）随项目一起归档。</a:t>
-            </a:r>
-          </a:p>
-        </p:txBody>
-      </p:sp>
-    </p:spTree>
-  </p:cSld>
-  <p:clrMapOvr>
-    <a:masterClrMapping/>
-  </p:clrMapOvr>
-</p:sld>
-</file>
-
 <file path=ppt/slides/slide2.xml><?xml version="1.0" encoding="utf-8"?>
 <p:sld xmlns:a="http://schemas.openxmlformats.org/drawingml/2006/main" xmlns:p="http://schemas.openxmlformats.org/presentationml/2006/main" xmlns:r="http://schemas.openxmlformats.org/officeDocument/2006/relationships">
   <p:cSld>
@@ -9848,6 +9705,594 @@
                 <a:latin typeface="微软雅黑"/>
               </a:rPr>
               <a:t>20</a:t>
+            </a:r>
+          </a:p>
+        </p:txBody>
+      </p:sp>
+      <p:sp>
+        <p:nvSpPr>
+          <p:cNvPr id="4" name="TextBox 3"/>
+          <p:cNvSpPr txBox="1"/>
+          <p:nvPr/>
+        </p:nvSpPr>
+        <p:spPr>
+          <a:xfrm>
+            <a:off x="713232" y="6355080"/>
+            <a:ext cx="5486400" cy="320040"/>
+          </a:xfrm>
+          <a:prstGeom prst="rect">
+            <a:avLst/>
+          </a:prstGeom>
+          <a:noFill/>
+        </p:spPr>
+        <p:txBody>
+          <a:bodyPr wrap="square">
+            <a:spAutoFit/>
+          </a:bodyPr>
+          <a:lstStyle/>
+          <a:p>
+            <a:pPr algn="l">
+              <a:spcAft>
+                <a:spcPts val="800"/>
+              </a:spcAft>
+            </a:pPr>
+            <a:r>
+              <a:rPr sz="1000" b="0">
+                <a:solidFill>
+                  <a:srgbClr val="566666"/>
+                </a:solidFill>
+                <a:latin typeface="微软雅黑"/>
+              </a:rPr>
+              <a:t>ToolpathLab · 功能开发记录</a:t>
+            </a:r>
+          </a:p>
+        </p:txBody>
+      </p:sp>
+      <p:sp>
+        <p:nvSpPr>
+          <p:cNvPr id="5" name="Rectangle 4"/>
+          <p:cNvSpPr/>
+          <p:nvPr/>
+        </p:nvSpPr>
+        <p:spPr>
+          <a:xfrm>
+            <a:off x="0" y="0"/>
+            <a:ext cx="164592" cy="6858000"/>
+          </a:xfrm>
+          <a:prstGeom prst="rect">
+            <a:avLst/>
+          </a:prstGeom>
+          <a:solidFill>
+            <a:srgbClr val="0E6B62"/>
+          </a:solidFill>
+          <a:ln>
+            <a:noFill/>
+          </a:ln>
+          <a:effectLst/>
+        </p:spPr>
+        <p:style>
+          <a:lnRef idx="1">
+            <a:schemeClr val="accent1"/>
+          </a:lnRef>
+          <a:fillRef idx="3">
+            <a:schemeClr val="accent1"/>
+          </a:fillRef>
+          <a:effectRef idx="2">
+            <a:schemeClr val="accent1"/>
+          </a:effectRef>
+          <a:fontRef idx="minor">
+            <a:schemeClr val="lt1"/>
+          </a:fontRef>
+        </p:style>
+        <p:txBody>
+          <a:bodyPr rtlCol="0" anchor="ctr"/>
+          <a:lstStyle/>
+          <a:p>
+            <a:pPr algn="ctr"/>
+          </a:p>
+        </p:txBody>
+      </p:sp>
+      <p:sp>
+        <p:nvSpPr>
+          <p:cNvPr id="6" name="TextBox 5"/>
+          <p:cNvSpPr txBox="1"/>
+          <p:nvPr/>
+        </p:nvSpPr>
+        <p:spPr>
+          <a:xfrm>
+            <a:off x="685800" y="384048"/>
+            <a:ext cx="10789920" cy="822960"/>
+          </a:xfrm>
+          <a:prstGeom prst="rect">
+            <a:avLst/>
+          </a:prstGeom>
+          <a:noFill/>
+        </p:spPr>
+        <p:txBody>
+          <a:bodyPr wrap="square">
+            <a:spAutoFit/>
+          </a:bodyPr>
+          <a:lstStyle/>
+          <a:p>
+            <a:pPr algn="l">
+              <a:spcAft>
+                <a:spcPts val="200"/>
+              </a:spcAft>
+            </a:pPr>
+            <a:r>
+              <a:rPr sz="2700" b="1">
+                <a:solidFill>
+                  <a:srgbClr val="142A2E"/>
+                </a:solidFill>
+                <a:latin typeface="微软雅黑"/>
+              </a:rPr>
+              <a:t>七、已知限制与后续方向</a:t>
+            </a:r>
+          </a:p>
+        </p:txBody>
+      </p:sp>
+      <p:sp>
+        <p:nvSpPr>
+          <p:cNvPr id="7" name="TextBox 6"/>
+          <p:cNvSpPr txBox="1"/>
+          <p:nvPr/>
+        </p:nvSpPr>
+        <p:spPr>
+          <a:xfrm>
+            <a:off x="713232" y="1133856"/>
+            <a:ext cx="10881360" cy="457200"/>
+          </a:xfrm>
+          <a:prstGeom prst="rect">
+            <a:avLst/>
+          </a:prstGeom>
+          <a:noFill/>
+        </p:spPr>
+        <p:txBody>
+          <a:bodyPr wrap="square">
+            <a:spAutoFit/>
+          </a:bodyPr>
+          <a:lstStyle/>
+          <a:p>
+            <a:pPr algn="l">
+              <a:spcAft>
+                <a:spcPts val="0"/>
+              </a:spcAft>
+            </a:pPr>
+            <a:r>
+              <a:rPr sz="1250" b="0">
+                <a:solidFill>
+                  <a:srgbClr val="566666"/>
+                </a:solidFill>
+                <a:latin typeface="微软雅黑"/>
+              </a:rPr>
+              <a:t>如实交代边界，比夸大能力更有用</a:t>
+            </a:r>
+          </a:p>
+        </p:txBody>
+      </p:sp>
+      <p:sp>
+        <p:nvSpPr>
+          <p:cNvPr id="8" name="Rounded Rectangle 7"/>
+          <p:cNvSpPr/>
+          <p:nvPr/>
+        </p:nvSpPr>
+        <p:spPr>
+          <a:xfrm>
+            <a:off x="777240" y="1783080"/>
+            <a:ext cx="5120640" cy="4023360"/>
+          </a:xfrm>
+          <a:prstGeom prst="roundRect">
+            <a:avLst/>
+          </a:prstGeom>
+          <a:solidFill>
+            <a:srgbClr val="EEF1F1"/>
+          </a:solidFill>
+          <a:ln w="12700">
+            <a:solidFill>
+              <a:srgbClr val="566666"/>
+            </a:solidFill>
+          </a:ln>
+          <a:effectLst/>
+        </p:spPr>
+        <p:style>
+          <a:lnRef idx="1">
+            <a:schemeClr val="accent1"/>
+          </a:lnRef>
+          <a:fillRef idx="3">
+            <a:schemeClr val="accent1"/>
+          </a:fillRef>
+          <a:effectRef idx="2">
+            <a:schemeClr val="accent1"/>
+          </a:effectRef>
+          <a:fontRef idx="minor">
+            <a:schemeClr val="lt1"/>
+          </a:fontRef>
+        </p:style>
+        <p:txBody>
+          <a:bodyPr rtlCol="0" anchor="ctr" wrap="square" lIns="164592" tIns="109728"/>
+          <a:lstStyle/>
+          <a:p>
+            <a:pPr algn="ctr">
+              <a:spcAft>
+                <a:spcPts val="500"/>
+              </a:spcAft>
+            </a:pPr>
+            <a:r>
+              <a:rPr sz="1500" b="1">
+                <a:solidFill>
+                  <a:srgbClr val="566666"/>
+                </a:solidFill>
+                <a:latin typeface="微软雅黑"/>
+              </a:rPr>
+              <a:t>已知限制</a:t>
+            </a:r>
+          </a:p>
+          <a:p>
+            <a:pPr>
+              <a:spcAft>
+                <a:spcPts val="500"/>
+              </a:spcAft>
+            </a:pPr>
+            <a:r>
+              <a:rPr sz="1200" b="0">
+                <a:solidFill>
+                  <a:srgbClr val="142A2E"/>
+                </a:solidFill>
+                <a:latin typeface="微软雅黑"/>
+              </a:rPr>
+              <a:t>·  模型是 2.5D：刀轴始终竖直，刀具**不沿曲面法向偏置**——平底刀从第一个斜面刀路起就会过切，斜度超过 45° 时球头刀/圆鼻刀的刀侧也会切进坡面（切削仿真如实显示：30° 时 0.464 mm、60° 时 2.99 mm，与解析值一致）。要消掉它需要真正的三维偏置（沿曲面法向抬刀）。</a:t>
+            </a:r>
+          </a:p>
+          <a:p>
+            <a:pPr>
+              <a:spcAft>
+                <a:spcPts val="500"/>
+              </a:spcAft>
+            </a:pPr>
+            <a:r>
+              <a:rPr sz="1200" b="0">
+                <a:solidFill>
+                  <a:srgbClr val="142A2E"/>
+                </a:solidFill>
+                <a:latin typeface="微软雅黑"/>
+              </a:rPr>
+              <a:t>·  不做材料去除仿真：分层粗加工的层数、每层范围与顺序都是真的，但每层实际切多深、受力多少没有模拟。</a:t>
+            </a:r>
+          </a:p>
+          <a:p>
+            <a:pPr>
+              <a:spcAft>
+                <a:spcPts val="500"/>
+              </a:spcAft>
+            </a:pPr>
+            <a:r>
+              <a:rPr sz="1200" b="0">
+                <a:solidFill>
+                  <a:srgbClr val="142A2E"/>
+                </a:solidFill>
+                <a:latin typeface="微软雅黑"/>
+              </a:rPr>
+              <a:t>·  不计算残留高度：平面上球头刀与圆鼻刀的残留高度需要三维曲面加工模型。</a:t>
+            </a:r>
+          </a:p>
+          <a:p>
+            <a:pPr>
+              <a:spcAft>
+                <a:spcPts val="500"/>
+              </a:spcAft>
+            </a:pPr>
+            <a:r>
+              <a:rPr sz="1200" b="0">
+                <a:solidFill>
+                  <a:srgbClr val="142A2E"/>
+                </a:solidFill>
+                <a:latin typeface="微软雅黑"/>
+              </a:rPr>
+              <a:t>·  分层时层间会抬刀一次（每层是独立的进刀—走刀—抬刀），还没有“层间不抬刀”或“斜向下刀”的优化。</a:t>
+            </a:r>
+          </a:p>
+          <a:p>
+            <a:pPr>
+              <a:spcAft>
+                <a:spcPts val="500"/>
+              </a:spcAft>
+            </a:pPr>
+            <a:r>
+              <a:rPr sz="1200" b="0">
+                <a:solidFill>
+                  <a:srgbClr val="142A2E"/>
+                </a:solidFill>
+                <a:latin typeface="微软雅黑"/>
+              </a:rPr>
+              <a:t>·  毛坯目前只用于显示与分层起点的定义，不参与求交或装夹校验。</a:t>
+            </a:r>
+          </a:p>
+          <a:p>
+            <a:pPr>
+              <a:spcAft>
+                <a:spcPts val="500"/>
+              </a:spcAft>
+            </a:pPr>
+            <a:r>
+              <a:rPr sz="1200" b="0">
+                <a:solidFill>
+                  <a:srgbClr val="142A2E"/>
+                </a:solidFill>
+                <a:latin typeface="微软雅黑"/>
+              </a:rPr>
+              <a:t>·  未经真实机床验证：G-code 是标准的三轴指令，但没有在机床上跑过。</a:t>
+            </a:r>
+          </a:p>
+        </p:txBody>
+      </p:sp>
+      <p:sp>
+        <p:nvSpPr>
+          <p:cNvPr id="9" name="Rounded Rectangle 8"/>
+          <p:cNvSpPr/>
+          <p:nvPr/>
+        </p:nvSpPr>
+        <p:spPr>
+          <a:xfrm>
+            <a:off x="6263640" y="1783080"/>
+            <a:ext cx="5120640" cy="4023360"/>
+          </a:xfrm>
+          <a:prstGeom prst="roundRect">
+            <a:avLst/>
+          </a:prstGeom>
+          <a:solidFill>
+            <a:srgbClr val="E4F2F0"/>
+          </a:solidFill>
+          <a:ln w="12700">
+            <a:solidFill>
+              <a:srgbClr val="0E6B62"/>
+            </a:solidFill>
+          </a:ln>
+          <a:effectLst/>
+        </p:spPr>
+        <p:style>
+          <a:lnRef idx="1">
+            <a:schemeClr val="accent1"/>
+          </a:lnRef>
+          <a:fillRef idx="3">
+            <a:schemeClr val="accent1"/>
+          </a:fillRef>
+          <a:effectRef idx="2">
+            <a:schemeClr val="accent1"/>
+          </a:effectRef>
+          <a:fontRef idx="minor">
+            <a:schemeClr val="lt1"/>
+          </a:fontRef>
+        </p:style>
+        <p:txBody>
+          <a:bodyPr rtlCol="0" anchor="ctr" wrap="square" lIns="164592" tIns="109728"/>
+          <a:lstStyle/>
+          <a:p>
+            <a:pPr algn="ctr">
+              <a:spcAft>
+                <a:spcPts val="500"/>
+              </a:spcAft>
+            </a:pPr>
+            <a:r>
+              <a:rPr sz="1500" b="1">
+                <a:solidFill>
+                  <a:srgbClr val="0E6B62"/>
+                </a:solidFill>
+                <a:latin typeface="微软雅黑"/>
+              </a:rPr>
+              <a:t>后续可选方向</a:t>
+            </a:r>
+          </a:p>
+          <a:p>
+            <a:pPr>
+              <a:spcAft>
+                <a:spcPts val="500"/>
+              </a:spcAft>
+            </a:pPr>
+            <a:r>
+              <a:rPr sz="1200" b="0">
+                <a:solidFill>
+                  <a:srgbClr val="142A2E"/>
+                </a:solidFill>
+                <a:latin typeface="微软雅黑"/>
+              </a:rPr>
+              <a:t>·  沿曲面法向偏置（真正的三维刀补）：消掉斜度超过 45° 时球头刀/圆鼻刀刀侧切进坡面的问题。</a:t>
+            </a:r>
+          </a:p>
+          <a:p>
+            <a:pPr>
+              <a:spcAft>
+                <a:spcPts val="500"/>
+              </a:spcAft>
+            </a:pPr>
+            <a:r>
+              <a:rPr sz="1200" b="0">
+                <a:solidFill>
+                  <a:srgbClr val="142A2E"/>
+                </a:solidFill>
+                <a:latin typeface="微软雅黑"/>
+              </a:rPr>
+              <a:t>·  切宽按斜面真实长度计算：现在切宽量的是 XY 投影距离，斜面上真实间距 = 切宽 / cos(斜度)。</a:t>
+            </a:r>
+          </a:p>
+          <a:p>
+            <a:pPr>
+              <a:spcAft>
+                <a:spcPts val="500"/>
+              </a:spcAft>
+            </a:pPr>
+            <a:r>
+              <a:rPr sz="1200" b="0">
+                <a:solidFill>
+                  <a:srgbClr val="142A2E"/>
+                </a:solidFill>
+                <a:latin typeface="微软雅黑"/>
+              </a:rPr>
+              <a:t>·  层间不抬刀 / 斜向下刀：斜面上用螺旋或斜线进刀代替每层垂直扎刀。</a:t>
+            </a:r>
+          </a:p>
+          <a:p>
+            <a:pPr>
+              <a:spcAft>
+                <a:spcPts val="500"/>
+              </a:spcAft>
+            </a:pPr>
+            <a:r>
+              <a:rPr sz="1200" b="0">
+                <a:solidFill>
+                  <a:srgbClr val="142A2E"/>
+                </a:solidFill>
+                <a:latin typeface="微软雅黑"/>
+              </a:rPr>
+              <a:t>·  残留高度与球头刀残留模型：需要先支持真正的三维曲面区域。</a:t>
+            </a:r>
+          </a:p>
+          <a:p>
+            <a:pPr>
+              <a:spcAft>
+                <a:spcPts val="500"/>
+              </a:spcAft>
+            </a:pPr>
+            <a:r>
+              <a:rPr sz="1200" b="0">
+                <a:solidFill>
+                  <a:srgbClr val="142A2E"/>
+                </a:solidFill>
+                <a:latin typeface="微软雅黑"/>
+              </a:rPr>
+              <a:t>·  刀具库与多把刀：一个程序里粗精加工用不同刀具。</a:t>
+            </a:r>
+          </a:p>
+          <a:p>
+            <a:pPr>
+              <a:spcAft>
+                <a:spcPts val="500"/>
+              </a:spcAft>
+            </a:pPr>
+            <a:r>
+              <a:rPr sz="1200" b="0">
+                <a:solidFill>
+                  <a:srgbClr val="142A2E"/>
+                </a:solidFill>
+                <a:latin typeface="微软雅黑"/>
+              </a:rPr>
+              <a:t>·  平台那一层只走平顶范围：目前为了清干净，它是按整个区域走的，斜面上略有冗余。</a:t>
+            </a:r>
+          </a:p>
+          <a:p>
+            <a:pPr>
+              <a:spcAft>
+                <a:spcPts val="500"/>
+              </a:spcAft>
+            </a:pPr>
+            <a:r>
+              <a:rPr sz="1200" b="0">
+                <a:solidFill>
+                  <a:srgbClr val="142A2E"/>
+                </a:solidFill>
+                <a:latin typeface="微软雅黑"/>
+              </a:rPr>
+              <a:t>·  把 office 记录（本文档与配套 PPT）随项目一起归档。</a:t>
+            </a:r>
+          </a:p>
+        </p:txBody>
+      </p:sp>
+    </p:spTree>
+  </p:cSld>
+  <p:clrMapOvr>
+    <a:masterClrMapping/>
+  </p:clrMapOvr>
+</p:sld>
+</file>
+
+<file path=ppt/slides/slide21.xml><?xml version="1.0" encoding="utf-8"?>
+<p:sld xmlns:a="http://schemas.openxmlformats.org/drawingml/2006/main" xmlns:p="http://schemas.openxmlformats.org/presentationml/2006/main" xmlns:r="http://schemas.openxmlformats.org/officeDocument/2006/relationships">
+  <p:cSld>
+    <p:spTree>
+      <p:nvGrpSpPr>
+        <p:cNvPr id="1" name=""/>
+        <p:cNvGrpSpPr/>
+        <p:nvPr/>
+      </p:nvGrpSpPr>
+      <p:grpSpPr/>
+      <p:sp>
+        <p:nvSpPr>
+          <p:cNvPr id="2" name="Rectangle 1"/>
+          <p:cNvSpPr/>
+          <p:nvPr/>
+        </p:nvSpPr>
+        <p:spPr>
+          <a:xfrm>
+            <a:off x="0" y="0"/>
+            <a:ext cx="12191695" cy="6858000"/>
+          </a:xfrm>
+          <a:prstGeom prst="rect">
+            <a:avLst/>
+          </a:prstGeom>
+          <a:solidFill>
+            <a:srgbClr val="FFFFFF"/>
+          </a:solidFill>
+          <a:ln>
+            <a:noFill/>
+          </a:ln>
+          <a:effectLst/>
+        </p:spPr>
+        <p:style>
+          <a:lnRef idx="1">
+            <a:schemeClr val="accent1"/>
+          </a:lnRef>
+          <a:fillRef idx="3">
+            <a:schemeClr val="accent1"/>
+          </a:fillRef>
+          <a:effectRef idx="2">
+            <a:schemeClr val="accent1"/>
+          </a:effectRef>
+          <a:fontRef idx="minor">
+            <a:schemeClr val="lt1"/>
+          </a:fontRef>
+        </p:style>
+        <p:txBody>
+          <a:bodyPr rtlCol="0" anchor="ctr"/>
+          <a:lstStyle/>
+          <a:p>
+            <a:pPr algn="ctr"/>
+          </a:p>
+        </p:txBody>
+      </p:sp>
+      <p:sp>
+        <p:nvSpPr>
+          <p:cNvPr id="3" name="TextBox 2"/>
+          <p:cNvSpPr txBox="1"/>
+          <p:nvPr/>
+        </p:nvSpPr>
+        <p:spPr>
+          <a:xfrm>
+            <a:off x="11247120" y="6355080"/>
+            <a:ext cx="822960" cy="320040"/>
+          </a:xfrm>
+          <a:prstGeom prst="rect">
+            <a:avLst/>
+          </a:prstGeom>
+          <a:noFill/>
+        </p:spPr>
+        <p:txBody>
+          <a:bodyPr wrap="square">
+            <a:spAutoFit/>
+          </a:bodyPr>
+          <a:lstStyle/>
+          <a:p>
+            <a:pPr algn="r">
+              <a:spcAft>
+                <a:spcPts val="800"/>
+              </a:spcAft>
+            </a:pPr>
+            <a:r>
+              <a:rPr sz="1000" b="0">
+                <a:solidFill>
+                  <a:srgbClr val="566666"/>
+                </a:solidFill>
+                <a:latin typeface="微软雅黑"/>
+              </a:rPr>
+              <a:t>21</a:t>
             </a:r>
           </a:p>
         </p:txBody>

--- a/ToolpathLab-开发过程与功能介绍.pptx
+++ b/ToolpathLab-开发过程与功能介绍.pptx
@@ -6735,7 +6735,7 @@
                 </a:solidFill>
                 <a:latin typeface="微软雅黑"/>
               </a:rPr>
-              <a:t>·  快移不切料；回拖进度条从头重放；停止回到未切削毛坯</a:t>
+              <a:t>·  颜色分工：没切到的料是毛坯紫、切到加工面处变砂色，参照轮廓是淡灰白</a:t>
             </a:r>
           </a:p>
           <a:p>
@@ -6751,7 +6751,7 @@
                 </a:solidFill>
                 <a:latin typeface="微软雅黑"/>
               </a:rPr>
-              <a:t>·  内部 3136/3136 个节点走完都到加工面，残留只在刀具够不到的边界带</a:t>
+              <a:t>·  内部 12321/12321 个节点走完都到加工面，残留只在刀具够不到的边界带</a:t>
             </a:r>
           </a:p>
         </p:txBody>
@@ -9956,6 +9956,22 @@
                 </a:solidFill>
                 <a:latin typeface="微软雅黑"/>
               </a:rPr>
+              <a:t>·  切削仿真会把真实结果画出来：方形区域的**四个角**是圆刀具物理上够不到的（留柱状残留），边界上还有一圈约 0.8 mm 没切净——因为刀路按刀具足迹半径内缩，刀边只与边界相切，两刀之间够不到的地方就留下了。这两处都不是仿真的错，是当前刀路的真实后果。</a:t>
+            </a:r>
+          </a:p>
+          <a:p>
+            <a:pPr>
+              <a:spcAft>
+                <a:spcPts val="500"/>
+              </a:spcAft>
+            </a:pPr>
+            <a:r>
+              <a:rPr sz="1200" b="0">
+                <a:solidFill>
+                  <a:srgbClr val="142A2E"/>
+                </a:solidFill>
+                <a:latin typeface="微软雅黑"/>
+              </a:rPr>
               <a:t>·  不做材料去除仿真：分层粗加工的层数、每层范围与顺序都是真的，但每层实际切多深、受力多少没有模拟。</a:t>
             </a:r>
           </a:p>
@@ -10080,6 +10096,22 @@
                 <a:latin typeface="微软雅黑"/>
               </a:rPr>
               <a:t>后续可选方向</a:t>
+            </a:r>
+          </a:p>
+          <a:p>
+            <a:pPr>
+              <a:spcAft>
+                <a:spcPts val="500"/>
+              </a:spcAft>
+            </a:pPr>
+            <a:r>
+              <a:rPr sz="1200" b="0">
+                <a:solidFill>
+                  <a:srgbClr val="142A2E"/>
+                </a:solidFill>
+                <a:latin typeface="微软雅黑"/>
+              </a:rPr>
+              <a:t>·  让粗加工刀路的刀心可以走到区域边界：毛坯与区域齐平时外侧就是空刀，这样能清掉边界那一圈约 0.8 mm 的残留（需要区域能区分「零件边界」与「加工范围边界」，别把折痕那侧也放开）。</a:t>
             </a:r>
           </a:p>
           <a:p>

--- a/ToolpathLab-开发过程与功能介绍.pptx
+++ b/ToolpathLab-开发过程与功能介绍.pptx
@@ -26,6 +26,7 @@
     <p:sldId id="274" r:id="rId25"/>
     <p:sldId id="275" r:id="rId26"/>
     <p:sldId id="276" r:id="rId27"/>
+    <p:sldId id="277" r:id="rId28"/>
   </p:sldIdLst>
   <p:sldSz cx="12191695" cy="6858000" type="screen4x3"/>
   <p:notesSz cx="6858000" cy="9144000"/>
@@ -6974,7 +6975,7 @@
                 </a:solidFill>
                 <a:latin typeface="微软雅黑"/>
               </a:rPr>
-              <a:t>四、修复：斜面刀路被画在基准平面上</a:t>
+              <a:t>四、修复：刀心走到边界 + 切宽自动</a:t>
             </a:r>
           </a:p>
         </p:txBody>
@@ -7013,7 +7014,7 @@
                 </a:solidFill>
                 <a:latin typeface="微软雅黑"/>
               </a:rPr>
-              <a:t>用户看得见、Python 测试看不见的问题——所以补了一层前端几何自检</a:t>
+              <a:t>最外层刀路离边缘 0 &lt; 刀具半径；切宽填 0 = 自动（刀具直径 − 1）</a:t>
             </a:r>
           </a:p>
         </p:txBody>
@@ -7052,7 +7053,7 @@
                 </a:solidFill>
                 <a:latin typeface="微软雅黑"/>
               </a:rPr>
-              <a:t>·  现象：轮廓贴着斜面，刀路却横在基准平面上</a:t>
+              <a:t>·  原来：刀路按足迹半径内缩，刀边只与边界相切，两刀之间留一圈料、四个角也够不到</a:t>
             </a:r>
           </a:p>
           <a:p>
@@ -7068,7 +7069,7 @@
                 </a:solidFill>
                 <a:latin typeface="微软雅黑"/>
               </a:rPr>
-              <a:t>·  根因：liftPaths() 本意是加 0.05 mm 抬升躲 z-fighting，却把真实 Z 替换成了抬升常量</a:t>
+              <a:t>·  现在：区域把零件边界外扩一个足迹半径再内缩，刀心正好落在边界上</a:t>
             </a:r>
           </a:p>
           <a:p>
@@ -7084,7 +7085,7 @@
                 </a:solidFill>
                 <a:latin typeface="微软雅黑"/>
               </a:rPr>
-              <a:t>·  线索：轮廓用的是「真实 Z + 抬升」，两条路径不一致</a:t>
+              <a:t>·  刀边越界那半圈是空刀（毛坯竖直面与区域齐平，外面没有料）</a:t>
             </a:r>
           </a:p>
           <a:p>
@@ -7094,29 +7095,29 @@
               </a:spcAft>
             </a:pPr>
             <a:r>
+              <a:rPr sz="1350" b="0">
+                <a:solidFill>
+                  <a:srgbClr val="142A2E"/>
+                </a:solidFill>
+                <a:latin typeface="微软雅黑"/>
+              </a:rPr>
+              <a:t>·  折痕等「加工范围边界」不放开；分层时料边一侧保持不动，不会切进已成形的一侧</a:t>
+            </a:r>
+          </a:p>
+          <a:p>
+            <a:pPr algn="l">
+              <a:spcAft>
+                <a:spcPts val="1100"/>
+              </a:spcAft>
+            </a:pPr>
+            <a:r>
               <a:rPr sz="1350" b="1">
                 <a:solidFill>
                   <a:srgbClr val="142A2E"/>
                 </a:solidFill>
                 <a:latin typeface="微软雅黑"/>
               </a:rPr>
-              <a:t>·  修复：改成在真实 Z 上加抬升量（平面区域表现不变）</a:t>
-            </a:r>
-          </a:p>
-          <a:p>
-            <a:pPr algn="l">
-              <a:spcAft>
-                <a:spcPts val="1100"/>
-              </a:spcAft>
-            </a:pPr>
-            <a:r>
-              <a:rPr sz="1350" b="0">
-                <a:solidFill>
-                  <a:srgbClr val="142A2E"/>
-                </a:solidFill>
-                <a:latin typeface="微软雅黑"/>
-              </a:rPr>
-              <a:t>·  加固：新增 13 项前端几何自检，并把 bug 注入回去验证脚本会报错</a:t>
+              <a:t>·  验证：方形铣完 18225/18225 个节点全部到加工面，顶面范围 [0, 0]</a:t>
             </a:r>
           </a:p>
         </p:txBody>
@@ -7339,7 +7340,7 @@
                 </a:solidFill>
                 <a:latin typeface="微软雅黑"/>
               </a:rPr>
-              <a:t>四、修复：平顶之上的毛坯</a:t>
+              <a:t>四、修复：斜面刀路被画在基准平面上</a:t>
             </a:r>
           </a:p>
         </p:txBody>
@@ -7378,7 +7379,7 @@
                 </a:solidFill>
                 <a:latin typeface="微软雅黑"/>
               </a:rPr>
-              <a:t>「只加工斜面段」时精加工到不了平顶，那 2 mm 料就整整齐齐留在平顶上</a:t>
+              <a:t>用户看得见、Python 测试看不见的问题——所以补了一层前端几何自检</a:t>
             </a:r>
           </a:p>
         </p:txBody>
@@ -7417,7 +7418,7 @@
                 </a:solidFill>
                 <a:latin typeface="微软雅黑"/>
               </a:rPr>
-              <a:t>·  现象：零件没做完——平顶上留着一层与余量同厚的料</a:t>
+              <a:t>·  现象：轮廓贴着斜面，刀路却横在基准平面上</a:t>
             </a:r>
           </a:p>
           <a:p>
@@ -7433,7 +7434,7 @@
                 </a:solidFill>
                 <a:latin typeface="微软雅黑"/>
               </a:rPr>
-              <a:t>·  原因一（范围）：该层只返回斜面段的范围，平顶那一块 XY 根本不在刀路里</a:t>
+              <a:t>·  根因：liftPaths() 本意是加 0.05 mm 抬升躲 z-fighting，却把真实 Z 替换成了抬升常量</a:t>
             </a:r>
           </a:p>
           <a:p>
@@ -7449,7 +7450,7 @@
                 </a:solidFill>
                 <a:latin typeface="微软雅黑"/>
               </a:rPr>
-              <a:t>·  原因二（层高）：层是 82 / 62 / 42 / 22，没有一层正好落在平顶高度 80——在 82 切是削空气</a:t>
+              <a:t>·  线索：轮廓用的是「真实 Z + 抬升」，两条路径不一致</a:t>
             </a:r>
           </a:p>
           <a:p>
@@ -7465,7 +7466,7 @@
                 </a:solidFill>
                 <a:latin typeface="微软雅黑"/>
               </a:rPr>
-              <a:t>·  修复：区域报出平台高度，层里补上 80 这一层，且该层覆盖整个区域</a:t>
+              <a:t>·  修复：改成在真实 Z 上加抬升量（平面区域表现不变）</a:t>
             </a:r>
           </a:p>
           <a:p>
@@ -7481,130 +7482,7 @@
                 </a:solidFill>
                 <a:latin typeface="微软雅黑"/>
               </a:rPr>
-              <a:t>·  毛坯顶部余量为 0、或勾选「加工平顶」时都不补这一层</a:t>
-            </a:r>
-          </a:p>
-        </p:txBody>
-      </p:sp>
-      <p:sp>
-        <p:nvSpPr>
-          <p:cNvPr id="9" name="Rounded Rectangle 8"/>
-          <p:cNvSpPr/>
-          <p:nvPr/>
-        </p:nvSpPr>
-        <p:spPr>
-          <a:xfrm>
-            <a:off x="7680960" y="1828800"/>
-            <a:ext cx="3886200" cy="1920240"/>
-          </a:xfrm>
-          <a:prstGeom prst="roundRect">
-            <a:avLst/>
-          </a:prstGeom>
-          <a:solidFill>
-            <a:srgbClr val="E4F2F0"/>
-          </a:solidFill>
-          <a:ln w="12700">
-            <a:solidFill>
-              <a:srgbClr val="0E6B62"/>
-            </a:solidFill>
-          </a:ln>
-          <a:effectLst/>
-        </p:spPr>
-        <p:style>
-          <a:lnRef idx="1">
-            <a:schemeClr val="accent1"/>
-          </a:lnRef>
-          <a:fillRef idx="3">
-            <a:schemeClr val="accent1"/>
-          </a:fillRef>
-          <a:effectRef idx="2">
-            <a:schemeClr val="accent1"/>
-          </a:effectRef>
-          <a:fontRef idx="minor">
-            <a:schemeClr val="lt1"/>
-          </a:fontRef>
-        </p:style>
-        <p:txBody>
-          <a:bodyPr rtlCol="0" anchor="ctr" wrap="square" lIns="164592" tIns="109728"/>
-          <a:lstStyle/>
-          <a:p>
-            <a:pPr algn="ctr">
-              <a:spcAft>
-                <a:spcPts val="500"/>
-              </a:spcAft>
-            </a:pPr>
-            <a:r>
-              <a:rPr sz="1500" b="1">
-                <a:solidFill>
-                  <a:srgbClr val="0E6B62"/>
-                </a:solidFill>
-                <a:latin typeface="微软雅黑"/>
-              </a:rPr>
-              <a:t>修复前后的实测对比</a:t>
-            </a:r>
-          </a:p>
-          <a:p>
-            <a:pPr>
-              <a:spcAft>
-                <a:spcPts val="500"/>
-              </a:spcAft>
-            </a:pPr>
-            <a:r>
-              <a:rPr sz="1200" b="0">
-                <a:solidFill>
-                  <a:srgbClr val="142A2E"/>
-                </a:solidFill>
-                <a:latin typeface="微软雅黑"/>
-              </a:rPr>
-              <a:t>·  默认（余量 2、不分层）：水平层刀 14 条，Z = 80，x ∈ [−37, 37]</a:t>
-            </a:r>
-          </a:p>
-          <a:p>
-            <a:pPr>
-              <a:spcAft>
-                <a:spcPts val="500"/>
-              </a:spcAft>
-            </a:pPr>
-            <a:r>
-              <a:rPr sz="1200" b="0">
-                <a:solidFill>
-                  <a:srgbClr val="142A2E"/>
-                </a:solidFill>
-                <a:latin typeface="微软雅黑"/>
-              </a:rPr>
-              <a:t>·  折痕在 x = −6.188 → 平顶那一侧也被这一层覆盖</a:t>
-            </a:r>
-          </a:p>
-          <a:p>
-            <a:pPr>
-              <a:spcAft>
-                <a:spcPts val="500"/>
-              </a:spcAft>
-            </a:pPr>
-            <a:r>
-              <a:rPr sz="1200" b="0">
-                <a:solidFill>
-                  <a:srgbClr val="142A2E"/>
-                </a:solidFill>
-                <a:latin typeface="微软雅黑"/>
-              </a:rPr>
-              <a:t>·  余量 0（对照）：水平层刀 0 条</a:t>
-            </a:r>
-          </a:p>
-          <a:p>
-            <a:pPr>
-              <a:spcAft>
-                <a:spcPts val="500"/>
-              </a:spcAft>
-            </a:pPr>
-            <a:r>
-              <a:rPr sz="1200" b="0">
-                <a:solidFill>
-                  <a:srgbClr val="142A2E"/>
-                </a:solidFill>
-                <a:latin typeface="微软雅黑"/>
-              </a:rPr>
-              <a:t>·  分层 20 mm：层 82 → 80 → 62 → 42 → 22，2 mm 那层放不下刀具已跳过并提醒</a:t>
+              <a:t>·  加固：新增 13 项前端几何自检，并把 bug 注入回去验证脚本会报错</a:t>
             </a:r>
           </a:p>
         </p:txBody>
@@ -7827,7 +7705,7 @@
                 </a:solidFill>
                 <a:latin typeface="微软雅黑"/>
               </a:rPr>
-              <a:t>五、一次做了又撤回的尝试：柱面区域</a:t>
+              <a:t>四、修复：平顶之上的毛坯</a:t>
             </a:r>
           </a:p>
         </p:txBody>
@@ -7866,45 +7744,21 @@
                 </a:solidFill>
                 <a:latin typeface="微软雅黑"/>
               </a:rPr>
-              <a:t>探索「真曲面」→ 确认方向不对 → 整块撤回，不留死抽象</a:t>
-            </a:r>
-          </a:p>
-        </p:txBody>
-      </p:sp>
-      <p:pic>
-        <p:nvPicPr>
-          <p:cNvPr id="8" name="Picture 7" descr="cylinder-region-preview.png"/>
-          <p:cNvPicPr>
-            <a:picLocks noChangeAspect="1"/>
-          </p:cNvPicPr>
-          <p:nvPr/>
-        </p:nvPicPr>
-        <p:blipFill>
-          <a:blip r:embed="rId2"/>
-          <a:stretch>
-            <a:fillRect/>
-          </a:stretch>
-        </p:blipFill>
-        <p:spPr>
-          <a:xfrm>
-            <a:off x="640080" y="1645920"/>
-            <a:ext cx="7406640" cy="2324259"/>
-          </a:xfrm>
-          <a:prstGeom prst="rect">
-            <a:avLst/>
-          </a:prstGeom>
-        </p:spPr>
-      </p:pic>
-      <p:sp>
-        <p:nvSpPr>
-          <p:cNvPr id="9" name="TextBox 8"/>
+              <a:t>「只加工斜面段」时精加工到不了平顶，那 2 mm 料就整整齐齐留在平顶上</a:t>
+            </a:r>
+          </a:p>
+        </p:txBody>
+      </p:sp>
+      <p:sp>
+        <p:nvSpPr>
+          <p:cNvPr id="8" name="TextBox 7"/>
           <p:cNvSpPr txBox="1"/>
           <p:nvPr/>
         </p:nvSpPr>
         <p:spPr>
           <a:xfrm>
-            <a:off x="640080" y="4025043"/>
-            <a:ext cx="7406640" cy="320040"/>
+            <a:off x="777240" y="1828800"/>
+            <a:ext cx="6675120" cy="4297680"/>
           </a:xfrm>
           <a:prstGeom prst="rect">
             <a:avLst/>
@@ -7917,138 +7771,206 @@
           </a:bodyPr>
           <a:lstStyle/>
           <a:p>
+            <a:pPr algn="l">
+              <a:spcAft>
+                <a:spcPts val="1100"/>
+              </a:spcAft>
+            </a:pPr>
+            <a:r>
+              <a:rPr sz="1350" b="1">
+                <a:solidFill>
+                  <a:srgbClr val="142A2E"/>
+                </a:solidFill>
+                <a:latin typeface="微软雅黑"/>
+              </a:rPr>
+              <a:t>·  现象：零件没做完——平顶上留着一层与余量同厚的料</a:t>
+            </a:r>
+          </a:p>
+          <a:p>
+            <a:pPr algn="l">
+              <a:spcAft>
+                <a:spcPts val="1100"/>
+              </a:spcAft>
+            </a:pPr>
+            <a:r>
+              <a:rPr sz="1350" b="0">
+                <a:solidFill>
+                  <a:srgbClr val="142A2E"/>
+                </a:solidFill>
+                <a:latin typeface="微软雅黑"/>
+              </a:rPr>
+              <a:t>·  原因一（范围）：该层只返回斜面段的范围，平顶那一块 XY 根本不在刀路里</a:t>
+            </a:r>
+          </a:p>
+          <a:p>
+            <a:pPr algn="l">
+              <a:spcAft>
+                <a:spcPts val="1100"/>
+              </a:spcAft>
+            </a:pPr>
+            <a:r>
+              <a:rPr sz="1350" b="0">
+                <a:solidFill>
+                  <a:srgbClr val="142A2E"/>
+                </a:solidFill>
+                <a:latin typeface="微软雅黑"/>
+              </a:rPr>
+              <a:t>·  原因二（层高）：层是 82 / 62 / 42 / 22，没有一层正好落在平顶高度 80——在 82 切是削空气</a:t>
+            </a:r>
+          </a:p>
+          <a:p>
+            <a:pPr algn="l">
+              <a:spcAft>
+                <a:spcPts val="1100"/>
+              </a:spcAft>
+            </a:pPr>
+            <a:r>
+              <a:rPr sz="1350" b="1">
+                <a:solidFill>
+                  <a:srgbClr val="142A2E"/>
+                </a:solidFill>
+                <a:latin typeface="微软雅黑"/>
+              </a:rPr>
+              <a:t>·  修复：区域报出平台高度，层里补上 80 这一层，且该层覆盖整个区域</a:t>
+            </a:r>
+          </a:p>
+          <a:p>
+            <a:pPr algn="l">
+              <a:spcAft>
+                <a:spcPts val="1100"/>
+              </a:spcAft>
+            </a:pPr>
+            <a:r>
+              <a:rPr sz="1350" b="0">
+                <a:solidFill>
+                  <a:srgbClr val="142A2E"/>
+                </a:solidFill>
+                <a:latin typeface="微软雅黑"/>
+              </a:rPr>
+              <a:t>·  毛坯顶部余量为 0、或勾选「加工平顶」时都不补这一层</a:t>
+            </a:r>
+          </a:p>
+        </p:txBody>
+      </p:sp>
+      <p:sp>
+        <p:nvSpPr>
+          <p:cNvPr id="9" name="Rounded Rectangle 8"/>
+          <p:cNvSpPr/>
+          <p:nvPr/>
+        </p:nvSpPr>
+        <p:spPr>
+          <a:xfrm>
+            <a:off x="7680960" y="1828800"/>
+            <a:ext cx="3886200" cy="1920240"/>
+          </a:xfrm>
+          <a:prstGeom prst="roundRect">
+            <a:avLst/>
+          </a:prstGeom>
+          <a:solidFill>
+            <a:srgbClr val="E4F2F0"/>
+          </a:solidFill>
+          <a:ln w="12700">
+            <a:solidFill>
+              <a:srgbClr val="0E6B62"/>
+            </a:solidFill>
+          </a:ln>
+          <a:effectLst/>
+        </p:spPr>
+        <p:style>
+          <a:lnRef idx="1">
+            <a:schemeClr val="accent1"/>
+          </a:lnRef>
+          <a:fillRef idx="3">
+            <a:schemeClr val="accent1"/>
+          </a:fillRef>
+          <a:effectRef idx="2">
+            <a:schemeClr val="accent1"/>
+          </a:effectRef>
+          <a:fontRef idx="minor">
+            <a:schemeClr val="lt1"/>
+          </a:fontRef>
+        </p:style>
+        <p:txBody>
+          <a:bodyPr rtlCol="0" anchor="ctr" wrap="square" lIns="164592" tIns="109728"/>
+          <a:lstStyle/>
+          <a:p>
             <a:pPr algn="ctr">
               <a:spcAft>
-                <a:spcPts val="0"/>
-              </a:spcAft>
-            </a:pPr>
-            <a:r>
-              <a:rPr sz="1000" b="0">
-                <a:solidFill>
-                  <a:srgbClr val="566666"/>
-                </a:solidFill>
-                <a:latin typeface="微软雅黑"/>
-              </a:rPr>
-              <a:t>已撤回的柱面区域（存档图）：左剖面、右俯视</a:t>
-            </a:r>
-          </a:p>
-        </p:txBody>
-      </p:sp>
-      <p:sp>
-        <p:nvSpPr>
-          <p:cNvPr id="10" name="TextBox 9"/>
-          <p:cNvSpPr txBox="1"/>
-          <p:nvPr/>
-        </p:nvSpPr>
-        <p:spPr>
-          <a:xfrm>
-            <a:off x="8138160" y="1828800"/>
-            <a:ext cx="3429000" cy="4297680"/>
-          </a:xfrm>
-          <a:prstGeom prst="rect">
-            <a:avLst/>
-          </a:prstGeom>
-          <a:noFill/>
-        </p:spPr>
-        <p:txBody>
-          <a:bodyPr wrap="square">
-            <a:spAutoFit/>
-          </a:bodyPr>
-          <a:lstStyle/>
-          <a:p>
-            <a:pPr algn="l">
-              <a:spcAft>
-                <a:spcPts val="900"/>
-              </a:spcAft>
-            </a:pPr>
-            <a:r>
-              <a:rPr sz="1220" b="1">
+                <a:spcPts val="500"/>
+              </a:spcAft>
+            </a:pPr>
+            <a:r>
+              <a:rPr sz="1500" b="1">
+                <a:solidFill>
+                  <a:srgbClr val="0E6B62"/>
+                </a:solidFill>
+                <a:latin typeface="微软雅黑"/>
+              </a:rPr>
+              <a:t>修复前后的实测对比</a:t>
+            </a:r>
+          </a:p>
+          <a:p>
+            <a:pPr>
+              <a:spcAft>
+                <a:spcPts val="500"/>
+              </a:spcAft>
+            </a:pPr>
+            <a:r>
+              <a:rPr sz="1200" b="0">
                 <a:solidFill>
                   <a:srgbClr val="142A2E"/>
                 </a:solidFill>
                 <a:latin typeface="微软雅黑"/>
               </a:rPr>
-              <a:t>·  做了什么：加工面是沿 Y 轴扫掠的圆柱面</a:t>
-            </a:r>
-          </a:p>
-          <a:p>
-            <a:pPr algn="l">
-              <a:spcAft>
-                <a:spcPts val="900"/>
-              </a:spcAft>
-            </a:pPr>
-            <a:r>
-              <a:rPr sz="1220" b="0">
+              <a:t>·  默认（余量 2、不分层）：水平层刀 14 条，Z = 80，x ∈ [−37, 37]</a:t>
+            </a:r>
+          </a:p>
+          <a:p>
+            <a:pPr>
+              <a:spcAft>
+                <a:spcPts val="500"/>
+              </a:spcAft>
+            </a:pPr>
+            <a:r>
+              <a:rPr sz="1200" b="0">
                 <a:solidFill>
                   <a:srgbClr val="142A2E"/>
                 </a:solidFill>
                 <a:latin typeface="微软雅黑"/>
               </a:rPr>
-              <a:t>·  区域声明曲面采样步长，刀路沿折线加密贴合曲面</a:t>
-            </a:r>
-          </a:p>
-          <a:p>
-            <a:pPr algn="l">
-              <a:spcAft>
-                <a:spcPts val="900"/>
-              </a:spcAft>
-            </a:pPr>
-            <a:r>
-              <a:rPr sz="1220" b="0">
+              <a:t>·  折痕在 x = −6.188 → 平顶那一侧也被这一层覆盖</a:t>
+            </a:r>
+          </a:p>
+          <a:p>
+            <a:pPr>
+              <a:spcAft>
+                <a:spcPts val="500"/>
+              </a:spcAft>
+            </a:pPr>
+            <a:r>
+              <a:rPr sz="1200" b="0">
                 <a:solidFill>
                   <a:srgbClr val="142A2E"/>
                 </a:solidFill>
                 <a:latin typeface="微软雅黑"/>
               </a:rPr>
-              <a:t>·  三维顶面改由前端用一条母线扫掠生成</a:t>
-            </a:r>
-          </a:p>
-          <a:p>
-            <a:pPr algn="l">
-              <a:spcAft>
-                <a:spcPts val="900"/>
-              </a:spcAft>
-            </a:pPr>
-            <a:r>
-              <a:rPr sz="1220" b="1">
+              <a:t>·  余量 0（对照）：水平层刀 0 条</a:t>
+            </a:r>
+          </a:p>
+          <a:p>
+            <a:pPr>
+              <a:spcAft>
+                <a:spcPts val="500"/>
+              </a:spcAft>
+            </a:pPr>
+            <a:r>
+              <a:rPr sz="1200" b="0">
                 <a:solidFill>
                   <a:srgbClr val="142A2E"/>
                 </a:solidFill>
                 <a:latin typeface="微软雅黑"/>
               </a:rPr>
-              <a:t>·  顺手修掉的真问题：横移安全面原先只看快移两端点，柱面的拱顶落在刀路中间时会被穿过去（实测低 17.5 mm）</a:t>
-            </a:r>
-          </a:p>
-          <a:p>
-            <a:pPr algn="l">
-              <a:spcAft>
-                <a:spcPts val="900"/>
-              </a:spcAft>
-            </a:pPr>
-            <a:r>
-              <a:rPr sz="1220" b="0">
-                <a:solidFill>
-                  <a:srgbClr val="142A2E"/>
-                </a:solidFill>
-                <a:latin typeface="微软雅黑"/>
-              </a:rPr>
-              <a:t>·  撤回时连同只为它服务的曲面加密、解析最高点钩子、母线扫掠显示一起删掉</a:t>
-            </a:r>
-          </a:p>
-          <a:p>
-            <a:pPr algn="l">
-              <a:spcAft>
-                <a:spcPts val="900"/>
-              </a:spcAft>
-            </a:pPr>
-            <a:r>
-              <a:rPr sz="1220" b="0">
-                <a:solidFill>
-                  <a:srgbClr val="142A2E"/>
-                </a:solidFill>
-                <a:latin typeface="微软雅黑"/>
-              </a:rPr>
-              <a:t>·  留下的长期资产只有一条经验：安全面要按路径最高点算</a:t>
+              <a:t>·  分层 20 mm：层 82 → 80 → 62 → 42 → 22，2 mm 那层放不下刀具已跳过并提醒</a:t>
             </a:r>
           </a:p>
         </p:txBody>
@@ -8150,6 +8072,1151 @@
                 <a:latin typeface="微软雅黑"/>
               </a:rPr>
               <a:t>19</a:t>
+            </a:r>
+          </a:p>
+        </p:txBody>
+      </p:sp>
+      <p:sp>
+        <p:nvSpPr>
+          <p:cNvPr id="4" name="TextBox 3"/>
+          <p:cNvSpPr txBox="1"/>
+          <p:nvPr/>
+        </p:nvSpPr>
+        <p:spPr>
+          <a:xfrm>
+            <a:off x="713232" y="6355080"/>
+            <a:ext cx="5486400" cy="320040"/>
+          </a:xfrm>
+          <a:prstGeom prst="rect">
+            <a:avLst/>
+          </a:prstGeom>
+          <a:noFill/>
+        </p:spPr>
+        <p:txBody>
+          <a:bodyPr wrap="square">
+            <a:spAutoFit/>
+          </a:bodyPr>
+          <a:lstStyle/>
+          <a:p>
+            <a:pPr algn="l">
+              <a:spcAft>
+                <a:spcPts val="800"/>
+              </a:spcAft>
+            </a:pPr>
+            <a:r>
+              <a:rPr sz="1000" b="0">
+                <a:solidFill>
+                  <a:srgbClr val="566666"/>
+                </a:solidFill>
+                <a:latin typeface="微软雅黑"/>
+              </a:rPr>
+              <a:t>ToolpathLab · 功能开发记录</a:t>
+            </a:r>
+          </a:p>
+        </p:txBody>
+      </p:sp>
+      <p:sp>
+        <p:nvSpPr>
+          <p:cNvPr id="5" name="Rectangle 4"/>
+          <p:cNvSpPr/>
+          <p:nvPr/>
+        </p:nvSpPr>
+        <p:spPr>
+          <a:xfrm>
+            <a:off x="0" y="0"/>
+            <a:ext cx="164592" cy="6858000"/>
+          </a:xfrm>
+          <a:prstGeom prst="rect">
+            <a:avLst/>
+          </a:prstGeom>
+          <a:solidFill>
+            <a:srgbClr val="0E6B62"/>
+          </a:solidFill>
+          <a:ln>
+            <a:noFill/>
+          </a:ln>
+          <a:effectLst/>
+        </p:spPr>
+        <p:style>
+          <a:lnRef idx="1">
+            <a:schemeClr val="accent1"/>
+          </a:lnRef>
+          <a:fillRef idx="3">
+            <a:schemeClr val="accent1"/>
+          </a:fillRef>
+          <a:effectRef idx="2">
+            <a:schemeClr val="accent1"/>
+          </a:effectRef>
+          <a:fontRef idx="minor">
+            <a:schemeClr val="lt1"/>
+          </a:fontRef>
+        </p:style>
+        <p:txBody>
+          <a:bodyPr rtlCol="0" anchor="ctr"/>
+          <a:lstStyle/>
+          <a:p>
+            <a:pPr algn="ctr"/>
+          </a:p>
+        </p:txBody>
+      </p:sp>
+      <p:sp>
+        <p:nvSpPr>
+          <p:cNvPr id="6" name="TextBox 5"/>
+          <p:cNvSpPr txBox="1"/>
+          <p:nvPr/>
+        </p:nvSpPr>
+        <p:spPr>
+          <a:xfrm>
+            <a:off x="685800" y="384048"/>
+            <a:ext cx="10789920" cy="822960"/>
+          </a:xfrm>
+          <a:prstGeom prst="rect">
+            <a:avLst/>
+          </a:prstGeom>
+          <a:noFill/>
+        </p:spPr>
+        <p:txBody>
+          <a:bodyPr wrap="square">
+            <a:spAutoFit/>
+          </a:bodyPr>
+          <a:lstStyle/>
+          <a:p>
+            <a:pPr algn="l">
+              <a:spcAft>
+                <a:spcPts val="200"/>
+              </a:spcAft>
+            </a:pPr>
+            <a:r>
+              <a:rPr sz="2700" b="1">
+                <a:solidFill>
+                  <a:srgbClr val="142A2E"/>
+                </a:solidFill>
+                <a:latin typeface="微软雅黑"/>
+              </a:rPr>
+              <a:t>五、一次做了又撤回的尝试：柱面区域</a:t>
+            </a:r>
+          </a:p>
+        </p:txBody>
+      </p:sp>
+      <p:sp>
+        <p:nvSpPr>
+          <p:cNvPr id="7" name="TextBox 6"/>
+          <p:cNvSpPr txBox="1"/>
+          <p:nvPr/>
+        </p:nvSpPr>
+        <p:spPr>
+          <a:xfrm>
+            <a:off x="713232" y="1133856"/>
+            <a:ext cx="10881360" cy="457200"/>
+          </a:xfrm>
+          <a:prstGeom prst="rect">
+            <a:avLst/>
+          </a:prstGeom>
+          <a:noFill/>
+        </p:spPr>
+        <p:txBody>
+          <a:bodyPr wrap="square">
+            <a:spAutoFit/>
+          </a:bodyPr>
+          <a:lstStyle/>
+          <a:p>
+            <a:pPr algn="l">
+              <a:spcAft>
+                <a:spcPts val="0"/>
+              </a:spcAft>
+            </a:pPr>
+            <a:r>
+              <a:rPr sz="1250" b="0">
+                <a:solidFill>
+                  <a:srgbClr val="566666"/>
+                </a:solidFill>
+                <a:latin typeface="微软雅黑"/>
+              </a:rPr>
+              <a:t>探索「真曲面」→ 确认方向不对 → 整块撤回，不留死抽象</a:t>
+            </a:r>
+          </a:p>
+        </p:txBody>
+      </p:sp>
+      <p:pic>
+        <p:nvPicPr>
+          <p:cNvPr id="8" name="Picture 7" descr="cylinder-region-preview.png"/>
+          <p:cNvPicPr>
+            <a:picLocks noChangeAspect="1"/>
+          </p:cNvPicPr>
+          <p:nvPr/>
+        </p:nvPicPr>
+        <p:blipFill>
+          <a:blip r:embed="rId2"/>
+          <a:stretch>
+            <a:fillRect/>
+          </a:stretch>
+        </p:blipFill>
+        <p:spPr>
+          <a:xfrm>
+            <a:off x="640080" y="1645920"/>
+            <a:ext cx="7406640" cy="2324259"/>
+          </a:xfrm>
+          <a:prstGeom prst="rect">
+            <a:avLst/>
+          </a:prstGeom>
+        </p:spPr>
+      </p:pic>
+      <p:sp>
+        <p:nvSpPr>
+          <p:cNvPr id="9" name="TextBox 8"/>
+          <p:cNvSpPr txBox="1"/>
+          <p:nvPr/>
+        </p:nvSpPr>
+        <p:spPr>
+          <a:xfrm>
+            <a:off x="640080" y="4025043"/>
+            <a:ext cx="7406640" cy="320040"/>
+          </a:xfrm>
+          <a:prstGeom prst="rect">
+            <a:avLst/>
+          </a:prstGeom>
+          <a:noFill/>
+        </p:spPr>
+        <p:txBody>
+          <a:bodyPr wrap="square">
+            <a:spAutoFit/>
+          </a:bodyPr>
+          <a:lstStyle/>
+          <a:p>
+            <a:pPr algn="ctr">
+              <a:spcAft>
+                <a:spcPts val="0"/>
+              </a:spcAft>
+            </a:pPr>
+            <a:r>
+              <a:rPr sz="1000" b="0">
+                <a:solidFill>
+                  <a:srgbClr val="566666"/>
+                </a:solidFill>
+                <a:latin typeface="微软雅黑"/>
+              </a:rPr>
+              <a:t>已撤回的柱面区域（存档图）：左剖面、右俯视</a:t>
+            </a:r>
+          </a:p>
+        </p:txBody>
+      </p:sp>
+      <p:sp>
+        <p:nvSpPr>
+          <p:cNvPr id="10" name="TextBox 9"/>
+          <p:cNvSpPr txBox="1"/>
+          <p:nvPr/>
+        </p:nvSpPr>
+        <p:spPr>
+          <a:xfrm>
+            <a:off x="8138160" y="1828800"/>
+            <a:ext cx="3429000" cy="4297680"/>
+          </a:xfrm>
+          <a:prstGeom prst="rect">
+            <a:avLst/>
+          </a:prstGeom>
+          <a:noFill/>
+        </p:spPr>
+        <p:txBody>
+          <a:bodyPr wrap="square">
+            <a:spAutoFit/>
+          </a:bodyPr>
+          <a:lstStyle/>
+          <a:p>
+            <a:pPr algn="l">
+              <a:spcAft>
+                <a:spcPts val="900"/>
+              </a:spcAft>
+            </a:pPr>
+            <a:r>
+              <a:rPr sz="1220" b="1">
+                <a:solidFill>
+                  <a:srgbClr val="142A2E"/>
+                </a:solidFill>
+                <a:latin typeface="微软雅黑"/>
+              </a:rPr>
+              <a:t>·  做了什么：加工面是沿 Y 轴扫掠的圆柱面</a:t>
+            </a:r>
+          </a:p>
+          <a:p>
+            <a:pPr algn="l">
+              <a:spcAft>
+                <a:spcPts val="900"/>
+              </a:spcAft>
+            </a:pPr>
+            <a:r>
+              <a:rPr sz="1220" b="0">
+                <a:solidFill>
+                  <a:srgbClr val="142A2E"/>
+                </a:solidFill>
+                <a:latin typeface="微软雅黑"/>
+              </a:rPr>
+              <a:t>·  区域声明曲面采样步长，刀路沿折线加密贴合曲面</a:t>
+            </a:r>
+          </a:p>
+          <a:p>
+            <a:pPr algn="l">
+              <a:spcAft>
+                <a:spcPts val="900"/>
+              </a:spcAft>
+            </a:pPr>
+            <a:r>
+              <a:rPr sz="1220" b="0">
+                <a:solidFill>
+                  <a:srgbClr val="142A2E"/>
+                </a:solidFill>
+                <a:latin typeface="微软雅黑"/>
+              </a:rPr>
+              <a:t>·  三维顶面改由前端用一条母线扫掠生成</a:t>
+            </a:r>
+          </a:p>
+          <a:p>
+            <a:pPr algn="l">
+              <a:spcAft>
+                <a:spcPts val="900"/>
+              </a:spcAft>
+            </a:pPr>
+            <a:r>
+              <a:rPr sz="1220" b="1">
+                <a:solidFill>
+                  <a:srgbClr val="142A2E"/>
+                </a:solidFill>
+                <a:latin typeface="微软雅黑"/>
+              </a:rPr>
+              <a:t>·  顺手修掉的真问题：横移安全面原先只看快移两端点，柱面的拱顶落在刀路中间时会被穿过去（实测低 17.5 mm）</a:t>
+            </a:r>
+          </a:p>
+          <a:p>
+            <a:pPr algn="l">
+              <a:spcAft>
+                <a:spcPts val="900"/>
+              </a:spcAft>
+            </a:pPr>
+            <a:r>
+              <a:rPr sz="1220" b="0">
+                <a:solidFill>
+                  <a:srgbClr val="142A2E"/>
+                </a:solidFill>
+                <a:latin typeface="微软雅黑"/>
+              </a:rPr>
+              <a:t>·  撤回时连同只为它服务的曲面加密、解析最高点钩子、母线扫掠显示一起删掉</a:t>
+            </a:r>
+          </a:p>
+          <a:p>
+            <a:pPr algn="l">
+              <a:spcAft>
+                <a:spcPts val="900"/>
+              </a:spcAft>
+            </a:pPr>
+            <a:r>
+              <a:rPr sz="1220" b="0">
+                <a:solidFill>
+                  <a:srgbClr val="142A2E"/>
+                </a:solidFill>
+                <a:latin typeface="微软雅黑"/>
+              </a:rPr>
+              <a:t>·  留下的长期资产只有一条经验：安全面要按路径最高点算</a:t>
+            </a:r>
+          </a:p>
+        </p:txBody>
+      </p:sp>
+    </p:spTree>
+  </p:cSld>
+  <p:clrMapOvr>
+    <a:masterClrMapping/>
+  </p:clrMapOvr>
+</p:sld>
+</file>
+
+<file path=ppt/slides/slide2.xml><?xml version="1.0" encoding="utf-8"?>
+<p:sld xmlns:a="http://schemas.openxmlformats.org/drawingml/2006/main" xmlns:p="http://schemas.openxmlformats.org/presentationml/2006/main" xmlns:r="http://schemas.openxmlformats.org/officeDocument/2006/relationships">
+  <p:cSld>
+    <p:spTree>
+      <p:nvGrpSpPr>
+        <p:cNvPr id="1" name=""/>
+        <p:cNvGrpSpPr/>
+        <p:nvPr/>
+      </p:nvGrpSpPr>
+      <p:grpSpPr/>
+      <p:sp>
+        <p:nvSpPr>
+          <p:cNvPr id="2" name="Rectangle 1"/>
+          <p:cNvSpPr/>
+          <p:nvPr/>
+        </p:nvSpPr>
+        <p:spPr>
+          <a:xfrm>
+            <a:off x="0" y="0"/>
+            <a:ext cx="12191695" cy="6858000"/>
+          </a:xfrm>
+          <a:prstGeom prst="rect">
+            <a:avLst/>
+          </a:prstGeom>
+          <a:solidFill>
+            <a:srgbClr val="FFFFFF"/>
+          </a:solidFill>
+          <a:ln>
+            <a:noFill/>
+          </a:ln>
+          <a:effectLst/>
+        </p:spPr>
+        <p:style>
+          <a:lnRef idx="1">
+            <a:schemeClr val="accent1"/>
+          </a:lnRef>
+          <a:fillRef idx="3">
+            <a:schemeClr val="accent1"/>
+          </a:fillRef>
+          <a:effectRef idx="2">
+            <a:schemeClr val="accent1"/>
+          </a:effectRef>
+          <a:fontRef idx="minor">
+            <a:schemeClr val="lt1"/>
+          </a:fontRef>
+        </p:style>
+        <p:txBody>
+          <a:bodyPr rtlCol="0" anchor="ctr"/>
+          <a:lstStyle/>
+          <a:p>
+            <a:pPr algn="ctr"/>
+          </a:p>
+        </p:txBody>
+      </p:sp>
+      <p:sp>
+        <p:nvSpPr>
+          <p:cNvPr id="3" name="TextBox 2"/>
+          <p:cNvSpPr txBox="1"/>
+          <p:nvPr/>
+        </p:nvSpPr>
+        <p:spPr>
+          <a:xfrm>
+            <a:off x="11247120" y="6355080"/>
+            <a:ext cx="822960" cy="320040"/>
+          </a:xfrm>
+          <a:prstGeom prst="rect">
+            <a:avLst/>
+          </a:prstGeom>
+          <a:noFill/>
+        </p:spPr>
+        <p:txBody>
+          <a:bodyPr wrap="square">
+            <a:spAutoFit/>
+          </a:bodyPr>
+          <a:lstStyle/>
+          <a:p>
+            <a:pPr algn="r">
+              <a:spcAft>
+                <a:spcPts val="800"/>
+              </a:spcAft>
+            </a:pPr>
+            <a:r>
+              <a:rPr sz="1000" b="0">
+                <a:solidFill>
+                  <a:srgbClr val="566666"/>
+                </a:solidFill>
+                <a:latin typeface="微软雅黑"/>
+              </a:rPr>
+              <a:t>2</a:t>
+            </a:r>
+          </a:p>
+        </p:txBody>
+      </p:sp>
+      <p:sp>
+        <p:nvSpPr>
+          <p:cNvPr id="4" name="TextBox 3"/>
+          <p:cNvSpPr txBox="1"/>
+          <p:nvPr/>
+        </p:nvSpPr>
+        <p:spPr>
+          <a:xfrm>
+            <a:off x="713232" y="6355080"/>
+            <a:ext cx="5486400" cy="320040"/>
+          </a:xfrm>
+          <a:prstGeom prst="rect">
+            <a:avLst/>
+          </a:prstGeom>
+          <a:noFill/>
+        </p:spPr>
+        <p:txBody>
+          <a:bodyPr wrap="square">
+            <a:spAutoFit/>
+          </a:bodyPr>
+          <a:lstStyle/>
+          <a:p>
+            <a:pPr algn="l">
+              <a:spcAft>
+                <a:spcPts val="800"/>
+              </a:spcAft>
+            </a:pPr>
+            <a:r>
+              <a:rPr sz="1000" b="0">
+                <a:solidFill>
+                  <a:srgbClr val="566666"/>
+                </a:solidFill>
+                <a:latin typeface="微软雅黑"/>
+              </a:rPr>
+              <a:t>ToolpathLab · 功能开发记录</a:t>
+            </a:r>
+          </a:p>
+        </p:txBody>
+      </p:sp>
+      <p:sp>
+        <p:nvSpPr>
+          <p:cNvPr id="5" name="Rectangle 4"/>
+          <p:cNvSpPr/>
+          <p:nvPr/>
+        </p:nvSpPr>
+        <p:spPr>
+          <a:xfrm>
+            <a:off x="0" y="0"/>
+            <a:ext cx="164592" cy="6858000"/>
+          </a:xfrm>
+          <a:prstGeom prst="rect">
+            <a:avLst/>
+          </a:prstGeom>
+          <a:solidFill>
+            <a:srgbClr val="0E6B62"/>
+          </a:solidFill>
+          <a:ln>
+            <a:noFill/>
+          </a:ln>
+          <a:effectLst/>
+        </p:spPr>
+        <p:style>
+          <a:lnRef idx="1">
+            <a:schemeClr val="accent1"/>
+          </a:lnRef>
+          <a:fillRef idx="3">
+            <a:schemeClr val="accent1"/>
+          </a:fillRef>
+          <a:effectRef idx="2">
+            <a:schemeClr val="accent1"/>
+          </a:effectRef>
+          <a:fontRef idx="minor">
+            <a:schemeClr val="lt1"/>
+          </a:fontRef>
+        </p:style>
+        <p:txBody>
+          <a:bodyPr rtlCol="0" anchor="ctr"/>
+          <a:lstStyle/>
+          <a:p>
+            <a:pPr algn="ctr"/>
+          </a:p>
+        </p:txBody>
+      </p:sp>
+      <p:sp>
+        <p:nvSpPr>
+          <p:cNvPr id="6" name="TextBox 5"/>
+          <p:cNvSpPr txBox="1"/>
+          <p:nvPr/>
+        </p:nvSpPr>
+        <p:spPr>
+          <a:xfrm>
+            <a:off x="685800" y="384048"/>
+            <a:ext cx="10789920" cy="822960"/>
+          </a:xfrm>
+          <a:prstGeom prst="rect">
+            <a:avLst/>
+          </a:prstGeom>
+          <a:noFill/>
+        </p:spPr>
+        <p:txBody>
+          <a:bodyPr wrap="square">
+            <a:spAutoFit/>
+          </a:bodyPr>
+          <a:lstStyle/>
+          <a:p>
+            <a:pPr algn="l">
+              <a:spcAft>
+                <a:spcPts val="200"/>
+              </a:spcAft>
+            </a:pPr>
+            <a:r>
+              <a:rPr sz="2700" b="1">
+                <a:solidFill>
+                  <a:srgbClr val="142A2E"/>
+                </a:solidFill>
+                <a:latin typeface="微软雅黑"/>
+              </a:rPr>
+              <a:t>目录</a:t>
+            </a:r>
+          </a:p>
+        </p:txBody>
+      </p:sp>
+      <p:sp>
+        <p:nvSpPr>
+          <p:cNvPr id="7" name="TextBox 6"/>
+          <p:cNvSpPr txBox="1"/>
+          <p:nvPr/>
+        </p:nvSpPr>
+        <p:spPr>
+          <a:xfrm>
+            <a:off x="713232" y="1133856"/>
+            <a:ext cx="10881360" cy="457200"/>
+          </a:xfrm>
+          <a:prstGeom prst="rect">
+            <a:avLst/>
+          </a:prstGeom>
+          <a:noFill/>
+        </p:spPr>
+        <p:txBody>
+          <a:bodyPr wrap="square">
+            <a:spAutoFit/>
+          </a:bodyPr>
+          <a:lstStyle/>
+          <a:p>
+            <a:pPr algn="l">
+              <a:spcAft>
+                <a:spcPts val="0"/>
+              </a:spcAft>
+            </a:pPr>
+            <a:r>
+              <a:rPr sz="1250" b="0">
+                <a:solidFill>
+                  <a:srgbClr val="566666"/>
+                </a:solidFill>
+                <a:latin typeface="微软雅黑"/>
+              </a:rPr>
+              <a:t>五个部分：先说清定位与节奏，再用真实刀路演示功能，最后交代工程实践与边界</a:t>
+            </a:r>
+          </a:p>
+        </p:txBody>
+      </p:sp>
+      <p:sp>
+        <p:nvSpPr>
+          <p:cNvPr id="8" name="Rounded Rectangle 7"/>
+          <p:cNvSpPr/>
+          <p:nvPr/>
+        </p:nvSpPr>
+        <p:spPr>
+          <a:xfrm>
+            <a:off x="777240" y="1828800"/>
+            <a:ext cx="5212080" cy="1371600"/>
+          </a:xfrm>
+          <a:prstGeom prst="roundRect">
+            <a:avLst/>
+          </a:prstGeom>
+          <a:solidFill>
+            <a:srgbClr val="E4F2F0"/>
+          </a:solidFill>
+          <a:ln w="12700">
+            <a:solidFill>
+              <a:srgbClr val="0E6B62"/>
+            </a:solidFill>
+          </a:ln>
+          <a:effectLst/>
+        </p:spPr>
+        <p:style>
+          <a:lnRef idx="1">
+            <a:schemeClr val="accent1"/>
+          </a:lnRef>
+          <a:fillRef idx="3">
+            <a:schemeClr val="accent1"/>
+          </a:fillRef>
+          <a:effectRef idx="2">
+            <a:schemeClr val="accent1"/>
+          </a:effectRef>
+          <a:fontRef idx="minor">
+            <a:schemeClr val="lt1"/>
+          </a:fontRef>
+        </p:style>
+        <p:txBody>
+          <a:bodyPr rtlCol="0" anchor="ctr" wrap="square" lIns="164592" tIns="109728"/>
+          <a:lstStyle/>
+          <a:p>
+            <a:pPr algn="ctr">
+              <a:spcAft>
+                <a:spcPts val="500"/>
+              </a:spcAft>
+            </a:pPr>
+            <a:r>
+              <a:rPr sz="1500" b="1">
+                <a:solidFill>
+                  <a:srgbClr val="0E6B62"/>
+                </a:solidFill>
+                <a:latin typeface="微软雅黑"/>
+              </a:rPr>
+              <a:t>一、项目定位与技术栈</a:t>
+            </a:r>
+          </a:p>
+          <a:p>
+            <a:pPr>
+              <a:spcAft>
+                <a:spcPts val="500"/>
+              </a:spcAft>
+            </a:pPr>
+            <a:r>
+              <a:rPr sz="1200" b="0">
+                <a:solidFill>
+                  <a:srgbClr val="142A2E"/>
+                </a:solidFill>
+                <a:latin typeface="微软雅黑"/>
+              </a:rPr>
+              <a:t>·  一句话说明它解决什么问题</a:t>
+            </a:r>
+          </a:p>
+          <a:p>
+            <a:pPr>
+              <a:spcAft>
+                <a:spcPts val="500"/>
+              </a:spcAft>
+            </a:pPr>
+            <a:r>
+              <a:rPr sz="1200" b="0">
+                <a:solidFill>
+                  <a:srgbClr val="142A2E"/>
+                </a:solidFill>
+                <a:latin typeface="微软雅黑"/>
+              </a:rPr>
+              <a:t>·  代码分层与规模</a:t>
+            </a:r>
+          </a:p>
+        </p:txBody>
+      </p:sp>
+      <p:sp>
+        <p:nvSpPr>
+          <p:cNvPr id="9" name="Rounded Rectangle 8"/>
+          <p:cNvSpPr/>
+          <p:nvPr/>
+        </p:nvSpPr>
+        <p:spPr>
+          <a:xfrm>
+            <a:off x="6263640" y="1828800"/>
+            <a:ext cx="5120640" cy="1371600"/>
+          </a:xfrm>
+          <a:prstGeom prst="roundRect">
+            <a:avLst/>
+          </a:prstGeom>
+          <a:solidFill>
+            <a:srgbClr val="E4F2F0"/>
+          </a:solidFill>
+          <a:ln w="12700">
+            <a:solidFill>
+              <a:srgbClr val="0E6B62"/>
+            </a:solidFill>
+          </a:ln>
+          <a:effectLst/>
+        </p:spPr>
+        <p:style>
+          <a:lnRef idx="1">
+            <a:schemeClr val="accent1"/>
+          </a:lnRef>
+          <a:fillRef idx="3">
+            <a:schemeClr val="accent1"/>
+          </a:fillRef>
+          <a:effectRef idx="2">
+            <a:schemeClr val="accent1"/>
+          </a:effectRef>
+          <a:fontRef idx="minor">
+            <a:schemeClr val="lt1"/>
+          </a:fontRef>
+        </p:style>
+        <p:txBody>
+          <a:bodyPr rtlCol="0" anchor="ctr" wrap="square" lIns="164592" tIns="109728"/>
+          <a:lstStyle/>
+          <a:p>
+            <a:pPr algn="ctr">
+              <a:spcAft>
+                <a:spcPts val="500"/>
+              </a:spcAft>
+            </a:pPr>
+            <a:r>
+              <a:rPr sz="1500" b="1">
+                <a:solidFill>
+                  <a:srgbClr val="0E6B62"/>
+                </a:solidFill>
+                <a:latin typeface="微软雅黑"/>
+              </a:rPr>
+              <a:t>二、开发过程</a:t>
+            </a:r>
+          </a:p>
+          <a:p>
+            <a:pPr>
+              <a:spcAft>
+                <a:spcPts val="500"/>
+              </a:spcAft>
+            </a:pPr>
+            <a:r>
+              <a:rPr sz="1200" b="0">
+                <a:solidFill>
+                  <a:srgbClr val="142A2E"/>
+                </a:solidFill>
+                <a:latin typeface="微软雅黑"/>
+              </a:rPr>
+              <a:t>·  五个阶段与 14 次提交</a:t>
+            </a:r>
+          </a:p>
+          <a:p>
+            <a:pPr>
+              <a:spcAft>
+                <a:spcPts val="500"/>
+              </a:spcAft>
+            </a:pPr>
+            <a:r>
+              <a:rPr sz="1200" b="0">
+                <a:solidFill>
+                  <a:srgbClr val="142A2E"/>
+                </a:solidFill>
+                <a:latin typeface="微软雅黑"/>
+              </a:rPr>
+              <a:t>·  测试随功能一起长</a:t>
+            </a:r>
+          </a:p>
+        </p:txBody>
+      </p:sp>
+      <p:sp>
+        <p:nvSpPr>
+          <p:cNvPr id="10" name="Rounded Rectangle 9"/>
+          <p:cNvSpPr/>
+          <p:nvPr/>
+        </p:nvSpPr>
+        <p:spPr>
+          <a:xfrm>
+            <a:off x="777240" y="3429000"/>
+            <a:ext cx="5212080" cy="1371600"/>
+          </a:xfrm>
+          <a:prstGeom prst="roundRect">
+            <a:avLst/>
+          </a:prstGeom>
+          <a:solidFill>
+            <a:srgbClr val="FAF1DF"/>
+          </a:solidFill>
+          <a:ln w="12700">
+            <a:solidFill>
+              <a:srgbClr val="C2770A"/>
+            </a:solidFill>
+          </a:ln>
+          <a:effectLst/>
+        </p:spPr>
+        <p:style>
+          <a:lnRef idx="1">
+            <a:schemeClr val="accent1"/>
+          </a:lnRef>
+          <a:fillRef idx="3">
+            <a:schemeClr val="accent1"/>
+          </a:fillRef>
+          <a:effectRef idx="2">
+            <a:schemeClr val="accent1"/>
+          </a:effectRef>
+          <a:fontRef idx="minor">
+            <a:schemeClr val="lt1"/>
+          </a:fontRef>
+        </p:style>
+        <p:txBody>
+          <a:bodyPr rtlCol="0" anchor="ctr" wrap="square" lIns="164592" tIns="109728"/>
+          <a:lstStyle/>
+          <a:p>
+            <a:pPr algn="ctr">
+              <a:spcAft>
+                <a:spcPts val="500"/>
+              </a:spcAft>
+            </a:pPr>
+            <a:r>
+              <a:rPr sz="1500" b="1">
+                <a:solidFill>
+                  <a:srgbClr val="C2770A"/>
+                </a:solidFill>
+                <a:latin typeface="微软雅黑"/>
+              </a:rPr>
+              <a:t>三、功能演示</a:t>
+            </a:r>
+          </a:p>
+          <a:p>
+            <a:pPr>
+              <a:spcAft>
+                <a:spcPts val="500"/>
+              </a:spcAft>
+            </a:pPr>
+            <a:r>
+              <a:rPr sz="1200" b="0">
+                <a:solidFill>
+                  <a:srgbClr val="142A2E"/>
+                </a:solidFill>
+                <a:latin typeface="微软雅黑"/>
+              </a:rPr>
+              <a:t>·  刀具 / 区域 / 策略 / 毛坯 / 分层粗加工</a:t>
+            </a:r>
+          </a:p>
+          <a:p>
+            <a:pPr>
+              <a:spcAft>
+                <a:spcPts val="500"/>
+              </a:spcAft>
+            </a:pPr>
+            <a:r>
+              <a:rPr sz="1200" b="0">
+                <a:solidFill>
+                  <a:srgbClr val="142A2E"/>
+                </a:solidFill>
+                <a:latin typeface="微软雅黑"/>
+              </a:rPr>
+              <a:t>·  每个功能都配真实刀路图</a:t>
+            </a:r>
+          </a:p>
+        </p:txBody>
+      </p:sp>
+      <p:sp>
+        <p:nvSpPr>
+          <p:cNvPr id="11" name="Rounded Rectangle 10"/>
+          <p:cNvSpPr/>
+          <p:nvPr/>
+        </p:nvSpPr>
+        <p:spPr>
+          <a:xfrm>
+            <a:off x="6263640" y="3429000"/>
+            <a:ext cx="5120640" cy="1371600"/>
+          </a:xfrm>
+          <a:prstGeom prst="roundRect">
+            <a:avLst/>
+          </a:prstGeom>
+          <a:solidFill>
+            <a:srgbClr val="FAF1DF"/>
+          </a:solidFill>
+          <a:ln w="12700">
+            <a:solidFill>
+              <a:srgbClr val="C2770A"/>
+            </a:solidFill>
+          </a:ln>
+          <a:effectLst/>
+        </p:spPr>
+        <p:style>
+          <a:lnRef idx="1">
+            <a:schemeClr val="accent1"/>
+          </a:lnRef>
+          <a:fillRef idx="3">
+            <a:schemeClr val="accent1"/>
+          </a:fillRef>
+          <a:effectRef idx="2">
+            <a:schemeClr val="accent1"/>
+          </a:effectRef>
+          <a:fontRef idx="minor">
+            <a:schemeClr val="lt1"/>
+          </a:fontRef>
+        </p:style>
+        <p:txBody>
+          <a:bodyPr rtlCol="0" anchor="ctr" wrap="square" lIns="164592" tIns="109728"/>
+          <a:lstStyle/>
+          <a:p>
+            <a:pPr algn="ctr">
+              <a:spcAft>
+                <a:spcPts val="500"/>
+              </a:spcAft>
+            </a:pPr>
+            <a:r>
+              <a:rPr sz="1500" b="1">
+                <a:solidFill>
+                  <a:srgbClr val="C2770A"/>
+                </a:solidFill>
+                <a:latin typeface="微软雅黑"/>
+              </a:rPr>
+              <a:t>四、工程实践</a:t>
+            </a:r>
+          </a:p>
+          <a:p>
+            <a:pPr>
+              <a:spcAft>
+                <a:spcPts val="500"/>
+              </a:spcAft>
+            </a:pPr>
+            <a:r>
+              <a:rPr sz="1200" b="0">
+                <a:solidFill>
+                  <a:srgbClr val="142A2E"/>
+                </a:solidFill>
+                <a:latin typeface="微软雅黑"/>
+              </a:rPr>
+              <a:t>·  两层测试：263 项 + 13 项几何自检</a:t>
+            </a:r>
+          </a:p>
+          <a:p>
+            <a:pPr>
+              <a:spcAft>
+                <a:spcPts val="500"/>
+              </a:spcAft>
+            </a:pPr>
+            <a:r>
+              <a:rPr sz="1200" b="0">
+                <a:solidFill>
+                  <a:srgbClr val="142A2E"/>
+                </a:solidFill>
+                <a:latin typeface="微软雅黑"/>
+              </a:rPr>
+              <a:t>·  被测试守住的关键不变量</a:t>
+            </a:r>
+          </a:p>
+        </p:txBody>
+      </p:sp>
+      <p:sp>
+        <p:nvSpPr>
+          <p:cNvPr id="12" name="Rounded Rectangle 11"/>
+          <p:cNvSpPr/>
+          <p:nvPr/>
+        </p:nvSpPr>
+        <p:spPr>
+          <a:xfrm>
+            <a:off x="777240" y="5029200"/>
+            <a:ext cx="5212080" cy="1097280"/>
+          </a:xfrm>
+          <a:prstGeom prst="roundRect">
+            <a:avLst/>
+          </a:prstGeom>
+          <a:solidFill>
+            <a:srgbClr val="EEF1F1"/>
+          </a:solidFill>
+          <a:ln w="12700">
+            <a:solidFill>
+              <a:srgbClr val="566666"/>
+            </a:solidFill>
+          </a:ln>
+          <a:effectLst/>
+        </p:spPr>
+        <p:style>
+          <a:lnRef idx="1">
+            <a:schemeClr val="accent1"/>
+          </a:lnRef>
+          <a:fillRef idx="3">
+            <a:schemeClr val="accent1"/>
+          </a:fillRef>
+          <a:effectRef idx="2">
+            <a:schemeClr val="accent1"/>
+          </a:effectRef>
+          <a:fontRef idx="minor">
+            <a:schemeClr val="lt1"/>
+          </a:fontRef>
+        </p:style>
+        <p:txBody>
+          <a:bodyPr rtlCol="0" anchor="ctr" wrap="square" lIns="164592" tIns="109728"/>
+          <a:lstStyle/>
+          <a:p>
+            <a:pPr algn="ctr">
+              <a:spcAft>
+                <a:spcPts val="500"/>
+              </a:spcAft>
+            </a:pPr>
+            <a:r>
+              <a:rPr sz="1500" b="1">
+                <a:solidFill>
+                  <a:srgbClr val="566666"/>
+                </a:solidFill>
+                <a:latin typeface="微软雅黑"/>
+              </a:rPr>
+              <a:t>五、边界与后续</a:t>
+            </a:r>
+          </a:p>
+          <a:p>
+            <a:pPr>
+              <a:spcAft>
+                <a:spcPts val="500"/>
+              </a:spcAft>
+            </a:pPr>
+            <a:r>
+              <a:rPr sz="1200" b="0">
+                <a:solidFill>
+                  <a:srgbClr val="142A2E"/>
+                </a:solidFill>
+                <a:latin typeface="微软雅黑"/>
+              </a:rPr>
+              <a:t>·  已知限制（2.5D、不做材料去除仿真…）与六个可选方向</a:t>
+            </a:r>
+          </a:p>
+        </p:txBody>
+      </p:sp>
+    </p:spTree>
+  </p:cSld>
+  <p:clrMapOvr>
+    <a:masterClrMapping/>
+  </p:clrMapOvr>
+</p:sld>
+</file>
+
+<file path=ppt/slides/slide20.xml><?xml version="1.0" encoding="utf-8"?>
+<p:sld xmlns:a="http://schemas.openxmlformats.org/drawingml/2006/main" xmlns:p="http://schemas.openxmlformats.org/presentationml/2006/main" xmlns:r="http://schemas.openxmlformats.org/officeDocument/2006/relationships">
+  <p:cSld>
+    <p:spTree>
+      <p:nvGrpSpPr>
+        <p:cNvPr id="1" name=""/>
+        <p:cNvGrpSpPr/>
+        <p:nvPr/>
+      </p:nvGrpSpPr>
+      <p:grpSpPr/>
+      <p:sp>
+        <p:nvSpPr>
+          <p:cNvPr id="2" name="Rectangle 1"/>
+          <p:cNvSpPr/>
+          <p:nvPr/>
+        </p:nvSpPr>
+        <p:spPr>
+          <a:xfrm>
+            <a:off x="0" y="0"/>
+            <a:ext cx="12191695" cy="6858000"/>
+          </a:xfrm>
+          <a:prstGeom prst="rect">
+            <a:avLst/>
+          </a:prstGeom>
+          <a:solidFill>
+            <a:srgbClr val="FFFFFF"/>
+          </a:solidFill>
+          <a:ln>
+            <a:noFill/>
+          </a:ln>
+          <a:effectLst/>
+        </p:spPr>
+        <p:style>
+          <a:lnRef idx="1">
+            <a:schemeClr val="accent1"/>
+          </a:lnRef>
+          <a:fillRef idx="3">
+            <a:schemeClr val="accent1"/>
+          </a:fillRef>
+          <a:effectRef idx="2">
+            <a:schemeClr val="accent1"/>
+          </a:effectRef>
+          <a:fontRef idx="minor">
+            <a:schemeClr val="lt1"/>
+          </a:fontRef>
+        </p:style>
+        <p:txBody>
+          <a:bodyPr rtlCol="0" anchor="ctr"/>
+          <a:lstStyle/>
+          <a:p>
+            <a:pPr algn="ctr"/>
+          </a:p>
+        </p:txBody>
+      </p:sp>
+      <p:sp>
+        <p:nvSpPr>
+          <p:cNvPr id="3" name="TextBox 2"/>
+          <p:cNvSpPr txBox="1"/>
+          <p:nvPr/>
+        </p:nvSpPr>
+        <p:spPr>
+          <a:xfrm>
+            <a:off x="11247120" y="6355080"/>
+            <a:ext cx="822960" cy="320040"/>
+          </a:xfrm>
+          <a:prstGeom prst="rect">
+            <a:avLst/>
+          </a:prstGeom>
+          <a:noFill/>
+        </p:spPr>
+        <p:txBody>
+          <a:bodyPr wrap="square">
+            <a:spAutoFit/>
+          </a:bodyPr>
+          <a:lstStyle/>
+          <a:p>
+            <a:pPr algn="r">
+              <a:spcAft>
+                <a:spcPts val="800"/>
+              </a:spcAft>
+            </a:pPr>
+            <a:r>
+              <a:rPr sz="1000" b="0">
+                <a:solidFill>
+                  <a:srgbClr val="566666"/>
+                </a:solidFill>
+                <a:latin typeface="微软雅黑"/>
+              </a:rPr>
+              <a:t>20</a:t>
             </a:r>
           </a:p>
         </p:txBody>
@@ -8915,1327 +9982,6 @@
 </p:sld>
 </file>
 
-<file path=ppt/slides/slide2.xml><?xml version="1.0" encoding="utf-8"?>
-<p:sld xmlns:a="http://schemas.openxmlformats.org/drawingml/2006/main" xmlns:p="http://schemas.openxmlformats.org/presentationml/2006/main" xmlns:r="http://schemas.openxmlformats.org/officeDocument/2006/relationships">
-  <p:cSld>
-    <p:spTree>
-      <p:nvGrpSpPr>
-        <p:cNvPr id="1" name=""/>
-        <p:cNvGrpSpPr/>
-        <p:nvPr/>
-      </p:nvGrpSpPr>
-      <p:grpSpPr/>
-      <p:sp>
-        <p:nvSpPr>
-          <p:cNvPr id="2" name="Rectangle 1"/>
-          <p:cNvSpPr/>
-          <p:nvPr/>
-        </p:nvSpPr>
-        <p:spPr>
-          <a:xfrm>
-            <a:off x="0" y="0"/>
-            <a:ext cx="12191695" cy="6858000"/>
-          </a:xfrm>
-          <a:prstGeom prst="rect">
-            <a:avLst/>
-          </a:prstGeom>
-          <a:solidFill>
-            <a:srgbClr val="FFFFFF"/>
-          </a:solidFill>
-          <a:ln>
-            <a:noFill/>
-          </a:ln>
-          <a:effectLst/>
-        </p:spPr>
-        <p:style>
-          <a:lnRef idx="1">
-            <a:schemeClr val="accent1"/>
-          </a:lnRef>
-          <a:fillRef idx="3">
-            <a:schemeClr val="accent1"/>
-          </a:fillRef>
-          <a:effectRef idx="2">
-            <a:schemeClr val="accent1"/>
-          </a:effectRef>
-          <a:fontRef idx="minor">
-            <a:schemeClr val="lt1"/>
-          </a:fontRef>
-        </p:style>
-        <p:txBody>
-          <a:bodyPr rtlCol="0" anchor="ctr"/>
-          <a:lstStyle/>
-          <a:p>
-            <a:pPr algn="ctr"/>
-          </a:p>
-        </p:txBody>
-      </p:sp>
-      <p:sp>
-        <p:nvSpPr>
-          <p:cNvPr id="3" name="TextBox 2"/>
-          <p:cNvSpPr txBox="1"/>
-          <p:nvPr/>
-        </p:nvSpPr>
-        <p:spPr>
-          <a:xfrm>
-            <a:off x="11247120" y="6355080"/>
-            <a:ext cx="822960" cy="320040"/>
-          </a:xfrm>
-          <a:prstGeom prst="rect">
-            <a:avLst/>
-          </a:prstGeom>
-          <a:noFill/>
-        </p:spPr>
-        <p:txBody>
-          <a:bodyPr wrap="square">
-            <a:spAutoFit/>
-          </a:bodyPr>
-          <a:lstStyle/>
-          <a:p>
-            <a:pPr algn="r">
-              <a:spcAft>
-                <a:spcPts val="800"/>
-              </a:spcAft>
-            </a:pPr>
-            <a:r>
-              <a:rPr sz="1000" b="0">
-                <a:solidFill>
-                  <a:srgbClr val="566666"/>
-                </a:solidFill>
-                <a:latin typeface="微软雅黑"/>
-              </a:rPr>
-              <a:t>2</a:t>
-            </a:r>
-          </a:p>
-        </p:txBody>
-      </p:sp>
-      <p:sp>
-        <p:nvSpPr>
-          <p:cNvPr id="4" name="TextBox 3"/>
-          <p:cNvSpPr txBox="1"/>
-          <p:nvPr/>
-        </p:nvSpPr>
-        <p:spPr>
-          <a:xfrm>
-            <a:off x="713232" y="6355080"/>
-            <a:ext cx="5486400" cy="320040"/>
-          </a:xfrm>
-          <a:prstGeom prst="rect">
-            <a:avLst/>
-          </a:prstGeom>
-          <a:noFill/>
-        </p:spPr>
-        <p:txBody>
-          <a:bodyPr wrap="square">
-            <a:spAutoFit/>
-          </a:bodyPr>
-          <a:lstStyle/>
-          <a:p>
-            <a:pPr algn="l">
-              <a:spcAft>
-                <a:spcPts val="800"/>
-              </a:spcAft>
-            </a:pPr>
-            <a:r>
-              <a:rPr sz="1000" b="0">
-                <a:solidFill>
-                  <a:srgbClr val="566666"/>
-                </a:solidFill>
-                <a:latin typeface="微软雅黑"/>
-              </a:rPr>
-              <a:t>ToolpathLab · 功能开发记录</a:t>
-            </a:r>
-          </a:p>
-        </p:txBody>
-      </p:sp>
-      <p:sp>
-        <p:nvSpPr>
-          <p:cNvPr id="5" name="Rectangle 4"/>
-          <p:cNvSpPr/>
-          <p:nvPr/>
-        </p:nvSpPr>
-        <p:spPr>
-          <a:xfrm>
-            <a:off x="0" y="0"/>
-            <a:ext cx="164592" cy="6858000"/>
-          </a:xfrm>
-          <a:prstGeom prst="rect">
-            <a:avLst/>
-          </a:prstGeom>
-          <a:solidFill>
-            <a:srgbClr val="0E6B62"/>
-          </a:solidFill>
-          <a:ln>
-            <a:noFill/>
-          </a:ln>
-          <a:effectLst/>
-        </p:spPr>
-        <p:style>
-          <a:lnRef idx="1">
-            <a:schemeClr val="accent1"/>
-          </a:lnRef>
-          <a:fillRef idx="3">
-            <a:schemeClr val="accent1"/>
-          </a:fillRef>
-          <a:effectRef idx="2">
-            <a:schemeClr val="accent1"/>
-          </a:effectRef>
-          <a:fontRef idx="minor">
-            <a:schemeClr val="lt1"/>
-          </a:fontRef>
-        </p:style>
-        <p:txBody>
-          <a:bodyPr rtlCol="0" anchor="ctr"/>
-          <a:lstStyle/>
-          <a:p>
-            <a:pPr algn="ctr"/>
-          </a:p>
-        </p:txBody>
-      </p:sp>
-      <p:sp>
-        <p:nvSpPr>
-          <p:cNvPr id="6" name="TextBox 5"/>
-          <p:cNvSpPr txBox="1"/>
-          <p:nvPr/>
-        </p:nvSpPr>
-        <p:spPr>
-          <a:xfrm>
-            <a:off x="685800" y="384048"/>
-            <a:ext cx="10789920" cy="822960"/>
-          </a:xfrm>
-          <a:prstGeom prst="rect">
-            <a:avLst/>
-          </a:prstGeom>
-          <a:noFill/>
-        </p:spPr>
-        <p:txBody>
-          <a:bodyPr wrap="square">
-            <a:spAutoFit/>
-          </a:bodyPr>
-          <a:lstStyle/>
-          <a:p>
-            <a:pPr algn="l">
-              <a:spcAft>
-                <a:spcPts val="200"/>
-              </a:spcAft>
-            </a:pPr>
-            <a:r>
-              <a:rPr sz="2700" b="1">
-                <a:solidFill>
-                  <a:srgbClr val="142A2E"/>
-                </a:solidFill>
-                <a:latin typeface="微软雅黑"/>
-              </a:rPr>
-              <a:t>目录</a:t>
-            </a:r>
-          </a:p>
-        </p:txBody>
-      </p:sp>
-      <p:sp>
-        <p:nvSpPr>
-          <p:cNvPr id="7" name="TextBox 6"/>
-          <p:cNvSpPr txBox="1"/>
-          <p:nvPr/>
-        </p:nvSpPr>
-        <p:spPr>
-          <a:xfrm>
-            <a:off x="713232" y="1133856"/>
-            <a:ext cx="10881360" cy="457200"/>
-          </a:xfrm>
-          <a:prstGeom prst="rect">
-            <a:avLst/>
-          </a:prstGeom>
-          <a:noFill/>
-        </p:spPr>
-        <p:txBody>
-          <a:bodyPr wrap="square">
-            <a:spAutoFit/>
-          </a:bodyPr>
-          <a:lstStyle/>
-          <a:p>
-            <a:pPr algn="l">
-              <a:spcAft>
-                <a:spcPts val="0"/>
-              </a:spcAft>
-            </a:pPr>
-            <a:r>
-              <a:rPr sz="1250" b="0">
-                <a:solidFill>
-                  <a:srgbClr val="566666"/>
-                </a:solidFill>
-                <a:latin typeface="微软雅黑"/>
-              </a:rPr>
-              <a:t>五个部分：先说清定位与节奏，再用真实刀路演示功能，最后交代工程实践与边界</a:t>
-            </a:r>
-          </a:p>
-        </p:txBody>
-      </p:sp>
-      <p:sp>
-        <p:nvSpPr>
-          <p:cNvPr id="8" name="Rounded Rectangle 7"/>
-          <p:cNvSpPr/>
-          <p:nvPr/>
-        </p:nvSpPr>
-        <p:spPr>
-          <a:xfrm>
-            <a:off x="777240" y="1828800"/>
-            <a:ext cx="5212080" cy="1371600"/>
-          </a:xfrm>
-          <a:prstGeom prst="roundRect">
-            <a:avLst/>
-          </a:prstGeom>
-          <a:solidFill>
-            <a:srgbClr val="E4F2F0"/>
-          </a:solidFill>
-          <a:ln w="12700">
-            <a:solidFill>
-              <a:srgbClr val="0E6B62"/>
-            </a:solidFill>
-          </a:ln>
-          <a:effectLst/>
-        </p:spPr>
-        <p:style>
-          <a:lnRef idx="1">
-            <a:schemeClr val="accent1"/>
-          </a:lnRef>
-          <a:fillRef idx="3">
-            <a:schemeClr val="accent1"/>
-          </a:fillRef>
-          <a:effectRef idx="2">
-            <a:schemeClr val="accent1"/>
-          </a:effectRef>
-          <a:fontRef idx="minor">
-            <a:schemeClr val="lt1"/>
-          </a:fontRef>
-        </p:style>
-        <p:txBody>
-          <a:bodyPr rtlCol="0" anchor="ctr" wrap="square" lIns="164592" tIns="109728"/>
-          <a:lstStyle/>
-          <a:p>
-            <a:pPr algn="ctr">
-              <a:spcAft>
-                <a:spcPts val="500"/>
-              </a:spcAft>
-            </a:pPr>
-            <a:r>
-              <a:rPr sz="1500" b="1">
-                <a:solidFill>
-                  <a:srgbClr val="0E6B62"/>
-                </a:solidFill>
-                <a:latin typeface="微软雅黑"/>
-              </a:rPr>
-              <a:t>一、项目定位与技术栈</a:t>
-            </a:r>
-          </a:p>
-          <a:p>
-            <a:pPr>
-              <a:spcAft>
-                <a:spcPts val="500"/>
-              </a:spcAft>
-            </a:pPr>
-            <a:r>
-              <a:rPr sz="1200" b="0">
-                <a:solidFill>
-                  <a:srgbClr val="142A2E"/>
-                </a:solidFill>
-                <a:latin typeface="微软雅黑"/>
-              </a:rPr>
-              <a:t>·  一句话说明它解决什么问题</a:t>
-            </a:r>
-          </a:p>
-          <a:p>
-            <a:pPr>
-              <a:spcAft>
-                <a:spcPts val="500"/>
-              </a:spcAft>
-            </a:pPr>
-            <a:r>
-              <a:rPr sz="1200" b="0">
-                <a:solidFill>
-                  <a:srgbClr val="142A2E"/>
-                </a:solidFill>
-                <a:latin typeface="微软雅黑"/>
-              </a:rPr>
-              <a:t>·  代码分层与规模</a:t>
-            </a:r>
-          </a:p>
-        </p:txBody>
-      </p:sp>
-      <p:sp>
-        <p:nvSpPr>
-          <p:cNvPr id="9" name="Rounded Rectangle 8"/>
-          <p:cNvSpPr/>
-          <p:nvPr/>
-        </p:nvSpPr>
-        <p:spPr>
-          <a:xfrm>
-            <a:off x="6263640" y="1828800"/>
-            <a:ext cx="5120640" cy="1371600"/>
-          </a:xfrm>
-          <a:prstGeom prst="roundRect">
-            <a:avLst/>
-          </a:prstGeom>
-          <a:solidFill>
-            <a:srgbClr val="E4F2F0"/>
-          </a:solidFill>
-          <a:ln w="12700">
-            <a:solidFill>
-              <a:srgbClr val="0E6B62"/>
-            </a:solidFill>
-          </a:ln>
-          <a:effectLst/>
-        </p:spPr>
-        <p:style>
-          <a:lnRef idx="1">
-            <a:schemeClr val="accent1"/>
-          </a:lnRef>
-          <a:fillRef idx="3">
-            <a:schemeClr val="accent1"/>
-          </a:fillRef>
-          <a:effectRef idx="2">
-            <a:schemeClr val="accent1"/>
-          </a:effectRef>
-          <a:fontRef idx="minor">
-            <a:schemeClr val="lt1"/>
-          </a:fontRef>
-        </p:style>
-        <p:txBody>
-          <a:bodyPr rtlCol="0" anchor="ctr" wrap="square" lIns="164592" tIns="109728"/>
-          <a:lstStyle/>
-          <a:p>
-            <a:pPr algn="ctr">
-              <a:spcAft>
-                <a:spcPts val="500"/>
-              </a:spcAft>
-            </a:pPr>
-            <a:r>
-              <a:rPr sz="1500" b="1">
-                <a:solidFill>
-                  <a:srgbClr val="0E6B62"/>
-                </a:solidFill>
-                <a:latin typeface="微软雅黑"/>
-              </a:rPr>
-              <a:t>二、开发过程</a:t>
-            </a:r>
-          </a:p>
-          <a:p>
-            <a:pPr>
-              <a:spcAft>
-                <a:spcPts val="500"/>
-              </a:spcAft>
-            </a:pPr>
-            <a:r>
-              <a:rPr sz="1200" b="0">
-                <a:solidFill>
-                  <a:srgbClr val="142A2E"/>
-                </a:solidFill>
-                <a:latin typeface="微软雅黑"/>
-              </a:rPr>
-              <a:t>·  五个阶段与 14 次提交</a:t>
-            </a:r>
-          </a:p>
-          <a:p>
-            <a:pPr>
-              <a:spcAft>
-                <a:spcPts val="500"/>
-              </a:spcAft>
-            </a:pPr>
-            <a:r>
-              <a:rPr sz="1200" b="0">
-                <a:solidFill>
-                  <a:srgbClr val="142A2E"/>
-                </a:solidFill>
-                <a:latin typeface="微软雅黑"/>
-              </a:rPr>
-              <a:t>·  测试随功能一起长</a:t>
-            </a:r>
-          </a:p>
-        </p:txBody>
-      </p:sp>
-      <p:sp>
-        <p:nvSpPr>
-          <p:cNvPr id="10" name="Rounded Rectangle 9"/>
-          <p:cNvSpPr/>
-          <p:nvPr/>
-        </p:nvSpPr>
-        <p:spPr>
-          <a:xfrm>
-            <a:off x="777240" y="3429000"/>
-            <a:ext cx="5212080" cy="1371600"/>
-          </a:xfrm>
-          <a:prstGeom prst="roundRect">
-            <a:avLst/>
-          </a:prstGeom>
-          <a:solidFill>
-            <a:srgbClr val="FAF1DF"/>
-          </a:solidFill>
-          <a:ln w="12700">
-            <a:solidFill>
-              <a:srgbClr val="C2770A"/>
-            </a:solidFill>
-          </a:ln>
-          <a:effectLst/>
-        </p:spPr>
-        <p:style>
-          <a:lnRef idx="1">
-            <a:schemeClr val="accent1"/>
-          </a:lnRef>
-          <a:fillRef idx="3">
-            <a:schemeClr val="accent1"/>
-          </a:fillRef>
-          <a:effectRef idx="2">
-            <a:schemeClr val="accent1"/>
-          </a:effectRef>
-          <a:fontRef idx="minor">
-            <a:schemeClr val="lt1"/>
-          </a:fontRef>
-        </p:style>
-        <p:txBody>
-          <a:bodyPr rtlCol="0" anchor="ctr" wrap="square" lIns="164592" tIns="109728"/>
-          <a:lstStyle/>
-          <a:p>
-            <a:pPr algn="ctr">
-              <a:spcAft>
-                <a:spcPts val="500"/>
-              </a:spcAft>
-            </a:pPr>
-            <a:r>
-              <a:rPr sz="1500" b="1">
-                <a:solidFill>
-                  <a:srgbClr val="C2770A"/>
-                </a:solidFill>
-                <a:latin typeface="微软雅黑"/>
-              </a:rPr>
-              <a:t>三、功能演示</a:t>
-            </a:r>
-          </a:p>
-          <a:p>
-            <a:pPr>
-              <a:spcAft>
-                <a:spcPts val="500"/>
-              </a:spcAft>
-            </a:pPr>
-            <a:r>
-              <a:rPr sz="1200" b="0">
-                <a:solidFill>
-                  <a:srgbClr val="142A2E"/>
-                </a:solidFill>
-                <a:latin typeface="微软雅黑"/>
-              </a:rPr>
-              <a:t>·  刀具 / 区域 / 策略 / 毛坯 / 分层粗加工</a:t>
-            </a:r>
-          </a:p>
-          <a:p>
-            <a:pPr>
-              <a:spcAft>
-                <a:spcPts val="500"/>
-              </a:spcAft>
-            </a:pPr>
-            <a:r>
-              <a:rPr sz="1200" b="0">
-                <a:solidFill>
-                  <a:srgbClr val="142A2E"/>
-                </a:solidFill>
-                <a:latin typeface="微软雅黑"/>
-              </a:rPr>
-              <a:t>·  每个功能都配真实刀路图</a:t>
-            </a:r>
-          </a:p>
-        </p:txBody>
-      </p:sp>
-      <p:sp>
-        <p:nvSpPr>
-          <p:cNvPr id="11" name="Rounded Rectangle 10"/>
-          <p:cNvSpPr/>
-          <p:nvPr/>
-        </p:nvSpPr>
-        <p:spPr>
-          <a:xfrm>
-            <a:off x="6263640" y="3429000"/>
-            <a:ext cx="5120640" cy="1371600"/>
-          </a:xfrm>
-          <a:prstGeom prst="roundRect">
-            <a:avLst/>
-          </a:prstGeom>
-          <a:solidFill>
-            <a:srgbClr val="FAF1DF"/>
-          </a:solidFill>
-          <a:ln w="12700">
-            <a:solidFill>
-              <a:srgbClr val="C2770A"/>
-            </a:solidFill>
-          </a:ln>
-          <a:effectLst/>
-        </p:spPr>
-        <p:style>
-          <a:lnRef idx="1">
-            <a:schemeClr val="accent1"/>
-          </a:lnRef>
-          <a:fillRef idx="3">
-            <a:schemeClr val="accent1"/>
-          </a:fillRef>
-          <a:effectRef idx="2">
-            <a:schemeClr val="accent1"/>
-          </a:effectRef>
-          <a:fontRef idx="minor">
-            <a:schemeClr val="lt1"/>
-          </a:fontRef>
-        </p:style>
-        <p:txBody>
-          <a:bodyPr rtlCol="0" anchor="ctr" wrap="square" lIns="164592" tIns="109728"/>
-          <a:lstStyle/>
-          <a:p>
-            <a:pPr algn="ctr">
-              <a:spcAft>
-                <a:spcPts val="500"/>
-              </a:spcAft>
-            </a:pPr>
-            <a:r>
-              <a:rPr sz="1500" b="1">
-                <a:solidFill>
-                  <a:srgbClr val="C2770A"/>
-                </a:solidFill>
-                <a:latin typeface="微软雅黑"/>
-              </a:rPr>
-              <a:t>四、工程实践</a:t>
-            </a:r>
-          </a:p>
-          <a:p>
-            <a:pPr>
-              <a:spcAft>
-                <a:spcPts val="500"/>
-              </a:spcAft>
-            </a:pPr>
-            <a:r>
-              <a:rPr sz="1200" b="0">
-                <a:solidFill>
-                  <a:srgbClr val="142A2E"/>
-                </a:solidFill>
-                <a:latin typeface="微软雅黑"/>
-              </a:rPr>
-              <a:t>·  两层测试：263 项 + 13 项几何自检</a:t>
-            </a:r>
-          </a:p>
-          <a:p>
-            <a:pPr>
-              <a:spcAft>
-                <a:spcPts val="500"/>
-              </a:spcAft>
-            </a:pPr>
-            <a:r>
-              <a:rPr sz="1200" b="0">
-                <a:solidFill>
-                  <a:srgbClr val="142A2E"/>
-                </a:solidFill>
-                <a:latin typeface="微软雅黑"/>
-              </a:rPr>
-              <a:t>·  被测试守住的关键不变量</a:t>
-            </a:r>
-          </a:p>
-        </p:txBody>
-      </p:sp>
-      <p:sp>
-        <p:nvSpPr>
-          <p:cNvPr id="12" name="Rounded Rectangle 11"/>
-          <p:cNvSpPr/>
-          <p:nvPr/>
-        </p:nvSpPr>
-        <p:spPr>
-          <a:xfrm>
-            <a:off x="777240" y="5029200"/>
-            <a:ext cx="5212080" cy="1097280"/>
-          </a:xfrm>
-          <a:prstGeom prst="roundRect">
-            <a:avLst/>
-          </a:prstGeom>
-          <a:solidFill>
-            <a:srgbClr val="EEF1F1"/>
-          </a:solidFill>
-          <a:ln w="12700">
-            <a:solidFill>
-              <a:srgbClr val="566666"/>
-            </a:solidFill>
-          </a:ln>
-          <a:effectLst/>
-        </p:spPr>
-        <p:style>
-          <a:lnRef idx="1">
-            <a:schemeClr val="accent1"/>
-          </a:lnRef>
-          <a:fillRef idx="3">
-            <a:schemeClr val="accent1"/>
-          </a:fillRef>
-          <a:effectRef idx="2">
-            <a:schemeClr val="accent1"/>
-          </a:effectRef>
-          <a:fontRef idx="minor">
-            <a:schemeClr val="lt1"/>
-          </a:fontRef>
-        </p:style>
-        <p:txBody>
-          <a:bodyPr rtlCol="0" anchor="ctr" wrap="square" lIns="164592" tIns="109728"/>
-          <a:lstStyle/>
-          <a:p>
-            <a:pPr algn="ctr">
-              <a:spcAft>
-                <a:spcPts val="500"/>
-              </a:spcAft>
-            </a:pPr>
-            <a:r>
-              <a:rPr sz="1500" b="1">
-                <a:solidFill>
-                  <a:srgbClr val="566666"/>
-                </a:solidFill>
-                <a:latin typeface="微软雅黑"/>
-              </a:rPr>
-              <a:t>五、边界与后续</a:t>
-            </a:r>
-          </a:p>
-          <a:p>
-            <a:pPr>
-              <a:spcAft>
-                <a:spcPts val="500"/>
-              </a:spcAft>
-            </a:pPr>
-            <a:r>
-              <a:rPr sz="1200" b="0">
-                <a:solidFill>
-                  <a:srgbClr val="142A2E"/>
-                </a:solidFill>
-                <a:latin typeface="微软雅黑"/>
-              </a:rPr>
-              <a:t>·  已知限制（2.5D、不做材料去除仿真…）与六个可选方向</a:t>
-            </a:r>
-          </a:p>
-        </p:txBody>
-      </p:sp>
-    </p:spTree>
-  </p:cSld>
-  <p:clrMapOvr>
-    <a:masterClrMapping/>
-  </p:clrMapOvr>
-</p:sld>
-</file>
-
-<file path=ppt/slides/slide20.xml><?xml version="1.0" encoding="utf-8"?>
-<p:sld xmlns:a="http://schemas.openxmlformats.org/drawingml/2006/main" xmlns:p="http://schemas.openxmlformats.org/presentationml/2006/main" xmlns:r="http://schemas.openxmlformats.org/officeDocument/2006/relationships">
-  <p:cSld>
-    <p:spTree>
-      <p:nvGrpSpPr>
-        <p:cNvPr id="1" name=""/>
-        <p:cNvGrpSpPr/>
-        <p:nvPr/>
-      </p:nvGrpSpPr>
-      <p:grpSpPr/>
-      <p:sp>
-        <p:nvSpPr>
-          <p:cNvPr id="2" name="Rectangle 1"/>
-          <p:cNvSpPr/>
-          <p:nvPr/>
-        </p:nvSpPr>
-        <p:spPr>
-          <a:xfrm>
-            <a:off x="0" y="0"/>
-            <a:ext cx="12191695" cy="6858000"/>
-          </a:xfrm>
-          <a:prstGeom prst="rect">
-            <a:avLst/>
-          </a:prstGeom>
-          <a:solidFill>
-            <a:srgbClr val="FFFFFF"/>
-          </a:solidFill>
-          <a:ln>
-            <a:noFill/>
-          </a:ln>
-          <a:effectLst/>
-        </p:spPr>
-        <p:style>
-          <a:lnRef idx="1">
-            <a:schemeClr val="accent1"/>
-          </a:lnRef>
-          <a:fillRef idx="3">
-            <a:schemeClr val="accent1"/>
-          </a:fillRef>
-          <a:effectRef idx="2">
-            <a:schemeClr val="accent1"/>
-          </a:effectRef>
-          <a:fontRef idx="minor">
-            <a:schemeClr val="lt1"/>
-          </a:fontRef>
-        </p:style>
-        <p:txBody>
-          <a:bodyPr rtlCol="0" anchor="ctr"/>
-          <a:lstStyle/>
-          <a:p>
-            <a:pPr algn="ctr"/>
-          </a:p>
-        </p:txBody>
-      </p:sp>
-      <p:sp>
-        <p:nvSpPr>
-          <p:cNvPr id="3" name="TextBox 2"/>
-          <p:cNvSpPr txBox="1"/>
-          <p:nvPr/>
-        </p:nvSpPr>
-        <p:spPr>
-          <a:xfrm>
-            <a:off x="11247120" y="6355080"/>
-            <a:ext cx="822960" cy="320040"/>
-          </a:xfrm>
-          <a:prstGeom prst="rect">
-            <a:avLst/>
-          </a:prstGeom>
-          <a:noFill/>
-        </p:spPr>
-        <p:txBody>
-          <a:bodyPr wrap="square">
-            <a:spAutoFit/>
-          </a:bodyPr>
-          <a:lstStyle/>
-          <a:p>
-            <a:pPr algn="r">
-              <a:spcAft>
-                <a:spcPts val="800"/>
-              </a:spcAft>
-            </a:pPr>
-            <a:r>
-              <a:rPr sz="1000" b="0">
-                <a:solidFill>
-                  <a:srgbClr val="566666"/>
-                </a:solidFill>
-                <a:latin typeface="微软雅黑"/>
-              </a:rPr>
-              <a:t>20</a:t>
-            </a:r>
-          </a:p>
-        </p:txBody>
-      </p:sp>
-      <p:sp>
-        <p:nvSpPr>
-          <p:cNvPr id="4" name="TextBox 3"/>
-          <p:cNvSpPr txBox="1"/>
-          <p:nvPr/>
-        </p:nvSpPr>
-        <p:spPr>
-          <a:xfrm>
-            <a:off x="713232" y="6355080"/>
-            <a:ext cx="5486400" cy="320040"/>
-          </a:xfrm>
-          <a:prstGeom prst="rect">
-            <a:avLst/>
-          </a:prstGeom>
-          <a:noFill/>
-        </p:spPr>
-        <p:txBody>
-          <a:bodyPr wrap="square">
-            <a:spAutoFit/>
-          </a:bodyPr>
-          <a:lstStyle/>
-          <a:p>
-            <a:pPr algn="l">
-              <a:spcAft>
-                <a:spcPts val="800"/>
-              </a:spcAft>
-            </a:pPr>
-            <a:r>
-              <a:rPr sz="1000" b="0">
-                <a:solidFill>
-                  <a:srgbClr val="566666"/>
-                </a:solidFill>
-                <a:latin typeface="微软雅黑"/>
-              </a:rPr>
-              <a:t>ToolpathLab · 功能开发记录</a:t>
-            </a:r>
-          </a:p>
-        </p:txBody>
-      </p:sp>
-      <p:sp>
-        <p:nvSpPr>
-          <p:cNvPr id="5" name="Rectangle 4"/>
-          <p:cNvSpPr/>
-          <p:nvPr/>
-        </p:nvSpPr>
-        <p:spPr>
-          <a:xfrm>
-            <a:off x="0" y="0"/>
-            <a:ext cx="164592" cy="6858000"/>
-          </a:xfrm>
-          <a:prstGeom prst="rect">
-            <a:avLst/>
-          </a:prstGeom>
-          <a:solidFill>
-            <a:srgbClr val="0E6B62"/>
-          </a:solidFill>
-          <a:ln>
-            <a:noFill/>
-          </a:ln>
-          <a:effectLst/>
-        </p:spPr>
-        <p:style>
-          <a:lnRef idx="1">
-            <a:schemeClr val="accent1"/>
-          </a:lnRef>
-          <a:fillRef idx="3">
-            <a:schemeClr val="accent1"/>
-          </a:fillRef>
-          <a:effectRef idx="2">
-            <a:schemeClr val="accent1"/>
-          </a:effectRef>
-          <a:fontRef idx="minor">
-            <a:schemeClr val="lt1"/>
-          </a:fontRef>
-        </p:style>
-        <p:txBody>
-          <a:bodyPr rtlCol="0" anchor="ctr"/>
-          <a:lstStyle/>
-          <a:p>
-            <a:pPr algn="ctr"/>
-          </a:p>
-        </p:txBody>
-      </p:sp>
-      <p:sp>
-        <p:nvSpPr>
-          <p:cNvPr id="6" name="TextBox 5"/>
-          <p:cNvSpPr txBox="1"/>
-          <p:nvPr/>
-        </p:nvSpPr>
-        <p:spPr>
-          <a:xfrm>
-            <a:off x="685800" y="384048"/>
-            <a:ext cx="10789920" cy="822960"/>
-          </a:xfrm>
-          <a:prstGeom prst="rect">
-            <a:avLst/>
-          </a:prstGeom>
-          <a:noFill/>
-        </p:spPr>
-        <p:txBody>
-          <a:bodyPr wrap="square">
-            <a:spAutoFit/>
-          </a:bodyPr>
-          <a:lstStyle/>
-          <a:p>
-            <a:pPr algn="l">
-              <a:spcAft>
-                <a:spcPts val="200"/>
-              </a:spcAft>
-            </a:pPr>
-            <a:r>
-              <a:rPr sz="2700" b="1">
-                <a:solidFill>
-                  <a:srgbClr val="142A2E"/>
-                </a:solidFill>
-                <a:latin typeface="微软雅黑"/>
-              </a:rPr>
-              <a:t>七、已知限制与后续方向</a:t>
-            </a:r>
-          </a:p>
-        </p:txBody>
-      </p:sp>
-      <p:sp>
-        <p:nvSpPr>
-          <p:cNvPr id="7" name="TextBox 6"/>
-          <p:cNvSpPr txBox="1"/>
-          <p:nvPr/>
-        </p:nvSpPr>
-        <p:spPr>
-          <a:xfrm>
-            <a:off x="713232" y="1133856"/>
-            <a:ext cx="10881360" cy="457200"/>
-          </a:xfrm>
-          <a:prstGeom prst="rect">
-            <a:avLst/>
-          </a:prstGeom>
-          <a:noFill/>
-        </p:spPr>
-        <p:txBody>
-          <a:bodyPr wrap="square">
-            <a:spAutoFit/>
-          </a:bodyPr>
-          <a:lstStyle/>
-          <a:p>
-            <a:pPr algn="l">
-              <a:spcAft>
-                <a:spcPts val="0"/>
-              </a:spcAft>
-            </a:pPr>
-            <a:r>
-              <a:rPr sz="1250" b="0">
-                <a:solidFill>
-                  <a:srgbClr val="566666"/>
-                </a:solidFill>
-                <a:latin typeface="微软雅黑"/>
-              </a:rPr>
-              <a:t>如实交代边界，比夸大能力更有用</a:t>
-            </a:r>
-          </a:p>
-        </p:txBody>
-      </p:sp>
-      <p:sp>
-        <p:nvSpPr>
-          <p:cNvPr id="8" name="Rounded Rectangle 7"/>
-          <p:cNvSpPr/>
-          <p:nvPr/>
-        </p:nvSpPr>
-        <p:spPr>
-          <a:xfrm>
-            <a:off x="777240" y="1783080"/>
-            <a:ext cx="5120640" cy="4023360"/>
-          </a:xfrm>
-          <a:prstGeom prst="roundRect">
-            <a:avLst/>
-          </a:prstGeom>
-          <a:solidFill>
-            <a:srgbClr val="EEF1F1"/>
-          </a:solidFill>
-          <a:ln w="12700">
-            <a:solidFill>
-              <a:srgbClr val="566666"/>
-            </a:solidFill>
-          </a:ln>
-          <a:effectLst/>
-        </p:spPr>
-        <p:style>
-          <a:lnRef idx="1">
-            <a:schemeClr val="accent1"/>
-          </a:lnRef>
-          <a:fillRef idx="3">
-            <a:schemeClr val="accent1"/>
-          </a:fillRef>
-          <a:effectRef idx="2">
-            <a:schemeClr val="accent1"/>
-          </a:effectRef>
-          <a:fontRef idx="minor">
-            <a:schemeClr val="lt1"/>
-          </a:fontRef>
-        </p:style>
-        <p:txBody>
-          <a:bodyPr rtlCol="0" anchor="ctr" wrap="square" lIns="164592" tIns="109728"/>
-          <a:lstStyle/>
-          <a:p>
-            <a:pPr algn="ctr">
-              <a:spcAft>
-                <a:spcPts val="500"/>
-              </a:spcAft>
-            </a:pPr>
-            <a:r>
-              <a:rPr sz="1500" b="1">
-                <a:solidFill>
-                  <a:srgbClr val="566666"/>
-                </a:solidFill>
-                <a:latin typeface="微软雅黑"/>
-              </a:rPr>
-              <a:t>已知限制</a:t>
-            </a:r>
-          </a:p>
-          <a:p>
-            <a:pPr>
-              <a:spcAft>
-                <a:spcPts val="500"/>
-              </a:spcAft>
-            </a:pPr>
-            <a:r>
-              <a:rPr sz="1200" b="0">
-                <a:solidFill>
-                  <a:srgbClr val="142A2E"/>
-                </a:solidFill>
-                <a:latin typeface="微软雅黑"/>
-              </a:rPr>
-              <a:t>·  模型是 2.5D：刀轴始终竖直，刀具**不沿曲面法向偏置**——平底刀从第一个斜面刀路起就会过切，斜度超过 45° 时球头刀/圆鼻刀的刀侧也会切进坡面（切削仿真如实显示：30° 时 0.464 mm、60° 时 2.99 mm，与解析值一致）。要消掉它需要真正的三维偏置（沿曲面法向抬刀）。</a:t>
-            </a:r>
-          </a:p>
-          <a:p>
-            <a:pPr>
-              <a:spcAft>
-                <a:spcPts val="500"/>
-              </a:spcAft>
-            </a:pPr>
-            <a:r>
-              <a:rPr sz="1200" b="0">
-                <a:solidFill>
-                  <a:srgbClr val="142A2E"/>
-                </a:solidFill>
-                <a:latin typeface="微软雅黑"/>
-              </a:rPr>
-              <a:t>·  切削仿真会把真实结果画出来：方形区域的**四个角**是圆刀具物理上够不到的（留柱状残留），边界上还有一圈约 0.8 mm 没切净——因为刀路按刀具足迹半径内缩，刀边只与边界相切，两刀之间够不到的地方就留下了。这两处都不是仿真的错，是当前刀路的真实后果。</a:t>
-            </a:r>
-          </a:p>
-          <a:p>
-            <a:pPr>
-              <a:spcAft>
-                <a:spcPts val="500"/>
-              </a:spcAft>
-            </a:pPr>
-            <a:r>
-              <a:rPr sz="1200" b="0">
-                <a:solidFill>
-                  <a:srgbClr val="142A2E"/>
-                </a:solidFill>
-                <a:latin typeface="微软雅黑"/>
-              </a:rPr>
-              <a:t>·  不做材料去除仿真：分层粗加工的层数、每层范围与顺序都是真的，但每层实际切多深、受力多少没有模拟。</a:t>
-            </a:r>
-          </a:p>
-          <a:p>
-            <a:pPr>
-              <a:spcAft>
-                <a:spcPts val="500"/>
-              </a:spcAft>
-            </a:pPr>
-            <a:r>
-              <a:rPr sz="1200" b="0">
-                <a:solidFill>
-                  <a:srgbClr val="142A2E"/>
-                </a:solidFill>
-                <a:latin typeface="微软雅黑"/>
-              </a:rPr>
-              <a:t>·  不计算残留高度：平面上球头刀与圆鼻刀的残留高度需要三维曲面加工模型。</a:t>
-            </a:r>
-          </a:p>
-          <a:p>
-            <a:pPr>
-              <a:spcAft>
-                <a:spcPts val="500"/>
-              </a:spcAft>
-            </a:pPr>
-            <a:r>
-              <a:rPr sz="1200" b="0">
-                <a:solidFill>
-                  <a:srgbClr val="142A2E"/>
-                </a:solidFill>
-                <a:latin typeface="微软雅黑"/>
-              </a:rPr>
-              <a:t>·  分层时层间会抬刀一次（每层是独立的进刀—走刀—抬刀），还没有“层间不抬刀”或“斜向下刀”的优化。</a:t>
-            </a:r>
-          </a:p>
-          <a:p>
-            <a:pPr>
-              <a:spcAft>
-                <a:spcPts val="500"/>
-              </a:spcAft>
-            </a:pPr>
-            <a:r>
-              <a:rPr sz="1200" b="0">
-                <a:solidFill>
-                  <a:srgbClr val="142A2E"/>
-                </a:solidFill>
-                <a:latin typeface="微软雅黑"/>
-              </a:rPr>
-              <a:t>·  毛坯目前只用于显示与分层起点的定义，不参与求交或装夹校验。</a:t>
-            </a:r>
-          </a:p>
-          <a:p>
-            <a:pPr>
-              <a:spcAft>
-                <a:spcPts val="500"/>
-              </a:spcAft>
-            </a:pPr>
-            <a:r>
-              <a:rPr sz="1200" b="0">
-                <a:solidFill>
-                  <a:srgbClr val="142A2E"/>
-                </a:solidFill>
-                <a:latin typeface="微软雅黑"/>
-              </a:rPr>
-              <a:t>·  未经真实机床验证：G-code 是标准的三轴指令，但没有在机床上跑过。</a:t>
-            </a:r>
-          </a:p>
-        </p:txBody>
-      </p:sp>
-      <p:sp>
-        <p:nvSpPr>
-          <p:cNvPr id="9" name="Rounded Rectangle 8"/>
-          <p:cNvSpPr/>
-          <p:nvPr/>
-        </p:nvSpPr>
-        <p:spPr>
-          <a:xfrm>
-            <a:off x="6263640" y="1783080"/>
-            <a:ext cx="5120640" cy="4023360"/>
-          </a:xfrm>
-          <a:prstGeom prst="roundRect">
-            <a:avLst/>
-          </a:prstGeom>
-          <a:solidFill>
-            <a:srgbClr val="E4F2F0"/>
-          </a:solidFill>
-          <a:ln w="12700">
-            <a:solidFill>
-              <a:srgbClr val="0E6B62"/>
-            </a:solidFill>
-          </a:ln>
-          <a:effectLst/>
-        </p:spPr>
-        <p:style>
-          <a:lnRef idx="1">
-            <a:schemeClr val="accent1"/>
-          </a:lnRef>
-          <a:fillRef idx="3">
-            <a:schemeClr val="accent1"/>
-          </a:fillRef>
-          <a:effectRef idx="2">
-            <a:schemeClr val="accent1"/>
-          </a:effectRef>
-          <a:fontRef idx="minor">
-            <a:schemeClr val="lt1"/>
-          </a:fontRef>
-        </p:style>
-        <p:txBody>
-          <a:bodyPr rtlCol="0" anchor="ctr" wrap="square" lIns="164592" tIns="109728"/>
-          <a:lstStyle/>
-          <a:p>
-            <a:pPr algn="ctr">
-              <a:spcAft>
-                <a:spcPts val="500"/>
-              </a:spcAft>
-            </a:pPr>
-            <a:r>
-              <a:rPr sz="1500" b="1">
-                <a:solidFill>
-                  <a:srgbClr val="0E6B62"/>
-                </a:solidFill>
-                <a:latin typeface="微软雅黑"/>
-              </a:rPr>
-              <a:t>后续可选方向</a:t>
-            </a:r>
-          </a:p>
-          <a:p>
-            <a:pPr>
-              <a:spcAft>
-                <a:spcPts val="500"/>
-              </a:spcAft>
-            </a:pPr>
-            <a:r>
-              <a:rPr sz="1200" b="0">
-                <a:solidFill>
-                  <a:srgbClr val="142A2E"/>
-                </a:solidFill>
-                <a:latin typeface="微软雅黑"/>
-              </a:rPr>
-              <a:t>·  让粗加工刀路的刀心可以走到区域边界：毛坯与区域齐平时外侧就是空刀，这样能清掉边界那一圈约 0.8 mm 的残留（需要区域能区分「零件边界」与「加工范围边界」，别把折痕那侧也放开）。</a:t>
-            </a:r>
-          </a:p>
-          <a:p>
-            <a:pPr>
-              <a:spcAft>
-                <a:spcPts val="500"/>
-              </a:spcAft>
-            </a:pPr>
-            <a:r>
-              <a:rPr sz="1200" b="0">
-                <a:solidFill>
-                  <a:srgbClr val="142A2E"/>
-                </a:solidFill>
-                <a:latin typeface="微软雅黑"/>
-              </a:rPr>
-              <a:t>·  沿曲面法向偏置（真正的三维刀补）：消掉斜度超过 45° 时球头刀/圆鼻刀刀侧切进坡面的问题。</a:t>
-            </a:r>
-          </a:p>
-          <a:p>
-            <a:pPr>
-              <a:spcAft>
-                <a:spcPts val="500"/>
-              </a:spcAft>
-            </a:pPr>
-            <a:r>
-              <a:rPr sz="1200" b="0">
-                <a:solidFill>
-                  <a:srgbClr val="142A2E"/>
-                </a:solidFill>
-                <a:latin typeface="微软雅黑"/>
-              </a:rPr>
-              <a:t>·  切宽按斜面真实长度计算：现在切宽量的是 XY 投影距离，斜面上真实间距 = 切宽 / cos(斜度)。</a:t>
-            </a:r>
-          </a:p>
-          <a:p>
-            <a:pPr>
-              <a:spcAft>
-                <a:spcPts val="500"/>
-              </a:spcAft>
-            </a:pPr>
-            <a:r>
-              <a:rPr sz="1200" b="0">
-                <a:solidFill>
-                  <a:srgbClr val="142A2E"/>
-                </a:solidFill>
-                <a:latin typeface="微软雅黑"/>
-              </a:rPr>
-              <a:t>·  层间不抬刀 / 斜向下刀：斜面上用螺旋或斜线进刀代替每层垂直扎刀。</a:t>
-            </a:r>
-          </a:p>
-          <a:p>
-            <a:pPr>
-              <a:spcAft>
-                <a:spcPts val="500"/>
-              </a:spcAft>
-            </a:pPr>
-            <a:r>
-              <a:rPr sz="1200" b="0">
-                <a:solidFill>
-                  <a:srgbClr val="142A2E"/>
-                </a:solidFill>
-                <a:latin typeface="微软雅黑"/>
-              </a:rPr>
-              <a:t>·  残留高度与球头刀残留模型：需要先支持真正的三维曲面区域。</a:t>
-            </a:r>
-          </a:p>
-          <a:p>
-            <a:pPr>
-              <a:spcAft>
-                <a:spcPts val="500"/>
-              </a:spcAft>
-            </a:pPr>
-            <a:r>
-              <a:rPr sz="1200" b="0">
-                <a:solidFill>
-                  <a:srgbClr val="142A2E"/>
-                </a:solidFill>
-                <a:latin typeface="微软雅黑"/>
-              </a:rPr>
-              <a:t>·  刀具库与多把刀：一个程序里粗精加工用不同刀具。</a:t>
-            </a:r>
-          </a:p>
-          <a:p>
-            <a:pPr>
-              <a:spcAft>
-                <a:spcPts val="500"/>
-              </a:spcAft>
-            </a:pPr>
-            <a:r>
-              <a:rPr sz="1200" b="0">
-                <a:solidFill>
-                  <a:srgbClr val="142A2E"/>
-                </a:solidFill>
-                <a:latin typeface="微软雅黑"/>
-              </a:rPr>
-              <a:t>·  平台那一层只走平顶范围：目前为了清干净，它是按整个区域走的，斜面上略有冗余。</a:t>
-            </a:r>
-          </a:p>
-          <a:p>
-            <a:pPr>
-              <a:spcAft>
-                <a:spcPts val="500"/>
-              </a:spcAft>
-            </a:pPr>
-            <a:r>
-              <a:rPr sz="1200" b="0">
-                <a:solidFill>
-                  <a:srgbClr val="142A2E"/>
-                </a:solidFill>
-                <a:latin typeface="微软雅黑"/>
-              </a:rPr>
-              <a:t>·  把 office 记录（本文档与配套 PPT）随项目一起归档。</a:t>
-            </a:r>
-          </a:p>
-        </p:txBody>
-      </p:sp>
-    </p:spTree>
-  </p:cSld>
-  <p:clrMapOvr>
-    <a:masterClrMapping/>
-  </p:clrMapOvr>
-</p:sld>
-</file>
-
 <file path=ppt/slides/slide21.xml><?xml version="1.0" encoding="utf-8"?>
 <p:sld xmlns:a="http://schemas.openxmlformats.org/drawingml/2006/main" xmlns:p="http://schemas.openxmlformats.org/presentationml/2006/main" xmlns:r="http://schemas.openxmlformats.org/officeDocument/2006/relationships">
   <p:cSld>
@@ -10325,6 +10071,610 @@
                 <a:latin typeface="微软雅黑"/>
               </a:rPr>
               <a:t>21</a:t>
+            </a:r>
+          </a:p>
+        </p:txBody>
+      </p:sp>
+      <p:sp>
+        <p:nvSpPr>
+          <p:cNvPr id="4" name="TextBox 3"/>
+          <p:cNvSpPr txBox="1"/>
+          <p:nvPr/>
+        </p:nvSpPr>
+        <p:spPr>
+          <a:xfrm>
+            <a:off x="713232" y="6355080"/>
+            <a:ext cx="5486400" cy="320040"/>
+          </a:xfrm>
+          <a:prstGeom prst="rect">
+            <a:avLst/>
+          </a:prstGeom>
+          <a:noFill/>
+        </p:spPr>
+        <p:txBody>
+          <a:bodyPr wrap="square">
+            <a:spAutoFit/>
+          </a:bodyPr>
+          <a:lstStyle/>
+          <a:p>
+            <a:pPr algn="l">
+              <a:spcAft>
+                <a:spcPts val="800"/>
+              </a:spcAft>
+            </a:pPr>
+            <a:r>
+              <a:rPr sz="1000" b="0">
+                <a:solidFill>
+                  <a:srgbClr val="566666"/>
+                </a:solidFill>
+                <a:latin typeface="微软雅黑"/>
+              </a:rPr>
+              <a:t>ToolpathLab · 功能开发记录</a:t>
+            </a:r>
+          </a:p>
+        </p:txBody>
+      </p:sp>
+      <p:sp>
+        <p:nvSpPr>
+          <p:cNvPr id="5" name="Rectangle 4"/>
+          <p:cNvSpPr/>
+          <p:nvPr/>
+        </p:nvSpPr>
+        <p:spPr>
+          <a:xfrm>
+            <a:off x="0" y="0"/>
+            <a:ext cx="164592" cy="6858000"/>
+          </a:xfrm>
+          <a:prstGeom prst="rect">
+            <a:avLst/>
+          </a:prstGeom>
+          <a:solidFill>
+            <a:srgbClr val="0E6B62"/>
+          </a:solidFill>
+          <a:ln>
+            <a:noFill/>
+          </a:ln>
+          <a:effectLst/>
+        </p:spPr>
+        <p:style>
+          <a:lnRef idx="1">
+            <a:schemeClr val="accent1"/>
+          </a:lnRef>
+          <a:fillRef idx="3">
+            <a:schemeClr val="accent1"/>
+          </a:fillRef>
+          <a:effectRef idx="2">
+            <a:schemeClr val="accent1"/>
+          </a:effectRef>
+          <a:fontRef idx="minor">
+            <a:schemeClr val="lt1"/>
+          </a:fontRef>
+        </p:style>
+        <p:txBody>
+          <a:bodyPr rtlCol="0" anchor="ctr"/>
+          <a:lstStyle/>
+          <a:p>
+            <a:pPr algn="ctr"/>
+          </a:p>
+        </p:txBody>
+      </p:sp>
+      <p:sp>
+        <p:nvSpPr>
+          <p:cNvPr id="6" name="TextBox 5"/>
+          <p:cNvSpPr txBox="1"/>
+          <p:nvPr/>
+        </p:nvSpPr>
+        <p:spPr>
+          <a:xfrm>
+            <a:off x="685800" y="384048"/>
+            <a:ext cx="10789920" cy="822960"/>
+          </a:xfrm>
+          <a:prstGeom prst="rect">
+            <a:avLst/>
+          </a:prstGeom>
+          <a:noFill/>
+        </p:spPr>
+        <p:txBody>
+          <a:bodyPr wrap="square">
+            <a:spAutoFit/>
+          </a:bodyPr>
+          <a:lstStyle/>
+          <a:p>
+            <a:pPr algn="l">
+              <a:spcAft>
+                <a:spcPts val="200"/>
+              </a:spcAft>
+            </a:pPr>
+            <a:r>
+              <a:rPr sz="2700" b="1">
+                <a:solidFill>
+                  <a:srgbClr val="142A2E"/>
+                </a:solidFill>
+                <a:latin typeface="微软雅黑"/>
+              </a:rPr>
+              <a:t>七、已知限制与后续方向</a:t>
+            </a:r>
+          </a:p>
+        </p:txBody>
+      </p:sp>
+      <p:sp>
+        <p:nvSpPr>
+          <p:cNvPr id="7" name="TextBox 6"/>
+          <p:cNvSpPr txBox="1"/>
+          <p:nvPr/>
+        </p:nvSpPr>
+        <p:spPr>
+          <a:xfrm>
+            <a:off x="713232" y="1133856"/>
+            <a:ext cx="10881360" cy="457200"/>
+          </a:xfrm>
+          <a:prstGeom prst="rect">
+            <a:avLst/>
+          </a:prstGeom>
+          <a:noFill/>
+        </p:spPr>
+        <p:txBody>
+          <a:bodyPr wrap="square">
+            <a:spAutoFit/>
+          </a:bodyPr>
+          <a:lstStyle/>
+          <a:p>
+            <a:pPr algn="l">
+              <a:spcAft>
+                <a:spcPts val="0"/>
+              </a:spcAft>
+            </a:pPr>
+            <a:r>
+              <a:rPr sz="1250" b="0">
+                <a:solidFill>
+                  <a:srgbClr val="566666"/>
+                </a:solidFill>
+                <a:latin typeface="微软雅黑"/>
+              </a:rPr>
+              <a:t>如实交代边界，比夸大能力更有用</a:t>
+            </a:r>
+          </a:p>
+        </p:txBody>
+      </p:sp>
+      <p:sp>
+        <p:nvSpPr>
+          <p:cNvPr id="8" name="Rounded Rectangle 7"/>
+          <p:cNvSpPr/>
+          <p:nvPr/>
+        </p:nvSpPr>
+        <p:spPr>
+          <a:xfrm>
+            <a:off x="777240" y="1783080"/>
+            <a:ext cx="5120640" cy="4023360"/>
+          </a:xfrm>
+          <a:prstGeom prst="roundRect">
+            <a:avLst/>
+          </a:prstGeom>
+          <a:solidFill>
+            <a:srgbClr val="EEF1F1"/>
+          </a:solidFill>
+          <a:ln w="12700">
+            <a:solidFill>
+              <a:srgbClr val="566666"/>
+            </a:solidFill>
+          </a:ln>
+          <a:effectLst/>
+        </p:spPr>
+        <p:style>
+          <a:lnRef idx="1">
+            <a:schemeClr val="accent1"/>
+          </a:lnRef>
+          <a:fillRef idx="3">
+            <a:schemeClr val="accent1"/>
+          </a:fillRef>
+          <a:effectRef idx="2">
+            <a:schemeClr val="accent1"/>
+          </a:effectRef>
+          <a:fontRef idx="minor">
+            <a:schemeClr val="lt1"/>
+          </a:fontRef>
+        </p:style>
+        <p:txBody>
+          <a:bodyPr rtlCol="0" anchor="ctr" wrap="square" lIns="164592" tIns="109728"/>
+          <a:lstStyle/>
+          <a:p>
+            <a:pPr algn="ctr">
+              <a:spcAft>
+                <a:spcPts val="500"/>
+              </a:spcAft>
+            </a:pPr>
+            <a:r>
+              <a:rPr sz="1500" b="1">
+                <a:solidFill>
+                  <a:srgbClr val="566666"/>
+                </a:solidFill>
+                <a:latin typeface="微软雅黑"/>
+              </a:rPr>
+              <a:t>已知限制</a:t>
+            </a:r>
+          </a:p>
+          <a:p>
+            <a:pPr>
+              <a:spcAft>
+                <a:spcPts val="500"/>
+              </a:spcAft>
+            </a:pPr>
+            <a:r>
+              <a:rPr sz="1200" b="0">
+                <a:solidFill>
+                  <a:srgbClr val="142A2E"/>
+                </a:solidFill>
+                <a:latin typeface="微软雅黑"/>
+              </a:rPr>
+              <a:t>·  模型是 2.5D：刀轴始终竖直，刀具**不沿曲面法向偏置**——平底刀从第一个斜面刀路起就会过切，斜度超过 45° 时球头刀/圆鼻刀的刀侧也会切进坡面（切削仿真如实显示：30° 时 0.464 mm、60° 时 2.99 mm，与解析值一致）。要消掉它需要真正的三维偏置（沿曲面法向抬刀）。</a:t>
+            </a:r>
+          </a:p>
+          <a:p>
+            <a:pPr>
+              <a:spcAft>
+                <a:spcPts val="500"/>
+              </a:spcAft>
+            </a:pPr>
+            <a:r>
+              <a:rPr sz="1200" b="0">
+                <a:solidFill>
+                  <a:srgbClr val="142A2E"/>
+                </a:solidFill>
+                <a:latin typeface="微软雅黑"/>
+              </a:rPr>
+              <a:t>·  切削仿真会把真实结果画出来：把刀心放开到区域边界之后，边界那一圈与四个角的残留已经消失（内部与边界 18225/18225 个节点全部切到加工面）；斜面上球头刀/圆鼻刀的刀侧切入是 2.5D 模型的固有结果（见上一条），仿真会如实显示。</a:t>
+            </a:r>
+          </a:p>
+          <a:p>
+            <a:pPr>
+              <a:spcAft>
+                <a:spcPts val="500"/>
+              </a:spcAft>
+            </a:pPr>
+            <a:r>
+              <a:rPr sz="1200" b="0">
+                <a:solidFill>
+                  <a:srgbClr val="142A2E"/>
+                </a:solidFill>
+                <a:latin typeface="微软雅黑"/>
+              </a:rPr>
+              <a:t>·  不做材料去除仿真：分层粗加工的层数、每层范围与顺序都是真的，但每层实际切多深、受力多少没有模拟。</a:t>
+            </a:r>
+          </a:p>
+          <a:p>
+            <a:pPr>
+              <a:spcAft>
+                <a:spcPts val="500"/>
+              </a:spcAft>
+            </a:pPr>
+            <a:r>
+              <a:rPr sz="1200" b="0">
+                <a:solidFill>
+                  <a:srgbClr val="142A2E"/>
+                </a:solidFill>
+                <a:latin typeface="微软雅黑"/>
+              </a:rPr>
+              <a:t>·  不计算残留高度：平面上球头刀与圆鼻刀的残留高度需要三维曲面加工模型。</a:t>
+            </a:r>
+          </a:p>
+          <a:p>
+            <a:pPr>
+              <a:spcAft>
+                <a:spcPts val="500"/>
+              </a:spcAft>
+            </a:pPr>
+            <a:r>
+              <a:rPr sz="1200" b="0">
+                <a:solidFill>
+                  <a:srgbClr val="142A2E"/>
+                </a:solidFill>
+                <a:latin typeface="微软雅黑"/>
+              </a:rPr>
+              <a:t>·  分层时层间会抬刀一次（每层是独立的进刀—走刀—抬刀），还没有“层间不抬刀”或“斜向下刀”的优化。</a:t>
+            </a:r>
+          </a:p>
+          <a:p>
+            <a:pPr>
+              <a:spcAft>
+                <a:spcPts val="500"/>
+              </a:spcAft>
+            </a:pPr>
+            <a:r>
+              <a:rPr sz="1200" b="0">
+                <a:solidFill>
+                  <a:srgbClr val="142A2E"/>
+                </a:solidFill>
+                <a:latin typeface="微软雅黑"/>
+              </a:rPr>
+              <a:t>·  毛坯目前只用于显示与分层起点的定义，不参与求交或装夹校验。</a:t>
+            </a:r>
+          </a:p>
+          <a:p>
+            <a:pPr>
+              <a:spcAft>
+                <a:spcPts val="500"/>
+              </a:spcAft>
+            </a:pPr>
+            <a:r>
+              <a:rPr sz="1200" b="0">
+                <a:solidFill>
+                  <a:srgbClr val="142A2E"/>
+                </a:solidFill>
+                <a:latin typeface="微软雅黑"/>
+              </a:rPr>
+              <a:t>·  未经真实机床验证：G-code 是标准的三轴指令，但没有在机床上跑过。</a:t>
+            </a:r>
+          </a:p>
+        </p:txBody>
+      </p:sp>
+      <p:sp>
+        <p:nvSpPr>
+          <p:cNvPr id="9" name="Rounded Rectangle 8"/>
+          <p:cNvSpPr/>
+          <p:nvPr/>
+        </p:nvSpPr>
+        <p:spPr>
+          <a:xfrm>
+            <a:off x="6263640" y="1783080"/>
+            <a:ext cx="5120640" cy="4023360"/>
+          </a:xfrm>
+          <a:prstGeom prst="roundRect">
+            <a:avLst/>
+          </a:prstGeom>
+          <a:solidFill>
+            <a:srgbClr val="E4F2F0"/>
+          </a:solidFill>
+          <a:ln w="12700">
+            <a:solidFill>
+              <a:srgbClr val="0E6B62"/>
+            </a:solidFill>
+          </a:ln>
+          <a:effectLst/>
+        </p:spPr>
+        <p:style>
+          <a:lnRef idx="1">
+            <a:schemeClr val="accent1"/>
+          </a:lnRef>
+          <a:fillRef idx="3">
+            <a:schemeClr val="accent1"/>
+          </a:fillRef>
+          <a:effectRef idx="2">
+            <a:schemeClr val="accent1"/>
+          </a:effectRef>
+          <a:fontRef idx="minor">
+            <a:schemeClr val="lt1"/>
+          </a:fontRef>
+        </p:style>
+        <p:txBody>
+          <a:bodyPr rtlCol="0" anchor="ctr" wrap="square" lIns="164592" tIns="109728"/>
+          <a:lstStyle/>
+          <a:p>
+            <a:pPr algn="ctr">
+              <a:spcAft>
+                <a:spcPts val="500"/>
+              </a:spcAft>
+            </a:pPr>
+            <a:r>
+              <a:rPr sz="1500" b="1">
+                <a:solidFill>
+                  <a:srgbClr val="0E6B62"/>
+                </a:solidFill>
+                <a:latin typeface="微软雅黑"/>
+              </a:rPr>
+              <a:t>后续可选方向</a:t>
+            </a:r>
+          </a:p>
+          <a:p>
+            <a:pPr>
+              <a:spcAft>
+                <a:spcPts val="500"/>
+              </a:spcAft>
+            </a:pPr>
+            <a:r>
+              <a:rPr sz="1200" b="0">
+                <a:solidFill>
+                  <a:srgbClr val="142A2E"/>
+                </a:solidFill>
+                <a:latin typeface="微软雅黑"/>
+              </a:rPr>
+              <a:t>·  沿曲面法向偏置（真正的三维刀补）：消掉斜度超过 45° 时球头刀/圆鼻刀刀侧切进坡面的问题。</a:t>
+            </a:r>
+          </a:p>
+          <a:p>
+            <a:pPr>
+              <a:spcAft>
+                <a:spcPts val="500"/>
+              </a:spcAft>
+            </a:pPr>
+            <a:r>
+              <a:rPr sz="1200" b="0">
+                <a:solidFill>
+                  <a:srgbClr val="142A2E"/>
+                </a:solidFill>
+                <a:latin typeface="微软雅黑"/>
+              </a:rPr>
+              <a:t>·  切宽按斜面真实长度计算：现在切宽量的是 XY 投影距离，斜面上真实间距 = 切宽 / cos(斜度)。</a:t>
+            </a:r>
+          </a:p>
+          <a:p>
+            <a:pPr>
+              <a:spcAft>
+                <a:spcPts val="500"/>
+              </a:spcAft>
+            </a:pPr>
+            <a:r>
+              <a:rPr sz="1200" b="0">
+                <a:solidFill>
+                  <a:srgbClr val="142A2E"/>
+                </a:solidFill>
+                <a:latin typeface="微软雅黑"/>
+              </a:rPr>
+              <a:t>·  层间不抬刀 / 斜向下刀：斜面上用螺旋或斜线进刀代替每层垂直扎刀。</a:t>
+            </a:r>
+          </a:p>
+          <a:p>
+            <a:pPr>
+              <a:spcAft>
+                <a:spcPts val="500"/>
+              </a:spcAft>
+            </a:pPr>
+            <a:r>
+              <a:rPr sz="1200" b="0">
+                <a:solidFill>
+                  <a:srgbClr val="142A2E"/>
+                </a:solidFill>
+                <a:latin typeface="微软雅黑"/>
+              </a:rPr>
+              <a:t>·  残留高度与球头刀残留模型：需要先支持真正的三维曲面区域。</a:t>
+            </a:r>
+          </a:p>
+          <a:p>
+            <a:pPr>
+              <a:spcAft>
+                <a:spcPts val="500"/>
+              </a:spcAft>
+            </a:pPr>
+            <a:r>
+              <a:rPr sz="1200" b="0">
+                <a:solidFill>
+                  <a:srgbClr val="142A2E"/>
+                </a:solidFill>
+                <a:latin typeface="微软雅黑"/>
+              </a:rPr>
+              <a:t>·  刀具库与多把刀：一个程序里粗精加工用不同刀具。</a:t>
+            </a:r>
+          </a:p>
+          <a:p>
+            <a:pPr>
+              <a:spcAft>
+                <a:spcPts val="500"/>
+              </a:spcAft>
+            </a:pPr>
+            <a:r>
+              <a:rPr sz="1200" b="0">
+                <a:solidFill>
+                  <a:srgbClr val="142A2E"/>
+                </a:solidFill>
+                <a:latin typeface="微软雅黑"/>
+              </a:rPr>
+              <a:t>·  平台那一层只走平顶范围：目前为了清干净，它是按整个区域走的，斜面上略有冗余。</a:t>
+            </a:r>
+          </a:p>
+          <a:p>
+            <a:pPr>
+              <a:spcAft>
+                <a:spcPts val="500"/>
+              </a:spcAft>
+            </a:pPr>
+            <a:r>
+              <a:rPr sz="1200" b="0">
+                <a:solidFill>
+                  <a:srgbClr val="142A2E"/>
+                </a:solidFill>
+                <a:latin typeface="微软雅黑"/>
+              </a:rPr>
+              <a:t>·  把 office 记录（本文档与配套 PPT）随项目一起归档。</a:t>
+            </a:r>
+          </a:p>
+        </p:txBody>
+      </p:sp>
+    </p:spTree>
+  </p:cSld>
+  <p:clrMapOvr>
+    <a:masterClrMapping/>
+  </p:clrMapOvr>
+</p:sld>
+</file>
+
+<file path=ppt/slides/slide22.xml><?xml version="1.0" encoding="utf-8"?>
+<p:sld xmlns:a="http://schemas.openxmlformats.org/drawingml/2006/main" xmlns:p="http://schemas.openxmlformats.org/presentationml/2006/main" xmlns:r="http://schemas.openxmlformats.org/officeDocument/2006/relationships">
+  <p:cSld>
+    <p:spTree>
+      <p:nvGrpSpPr>
+        <p:cNvPr id="1" name=""/>
+        <p:cNvGrpSpPr/>
+        <p:nvPr/>
+      </p:nvGrpSpPr>
+      <p:grpSpPr/>
+      <p:sp>
+        <p:nvSpPr>
+          <p:cNvPr id="2" name="Rectangle 1"/>
+          <p:cNvSpPr/>
+          <p:nvPr/>
+        </p:nvSpPr>
+        <p:spPr>
+          <a:xfrm>
+            <a:off x="0" y="0"/>
+            <a:ext cx="12191695" cy="6858000"/>
+          </a:xfrm>
+          <a:prstGeom prst="rect">
+            <a:avLst/>
+          </a:prstGeom>
+          <a:solidFill>
+            <a:srgbClr val="FFFFFF"/>
+          </a:solidFill>
+          <a:ln>
+            <a:noFill/>
+          </a:ln>
+          <a:effectLst/>
+        </p:spPr>
+        <p:style>
+          <a:lnRef idx="1">
+            <a:schemeClr val="accent1"/>
+          </a:lnRef>
+          <a:fillRef idx="3">
+            <a:schemeClr val="accent1"/>
+          </a:fillRef>
+          <a:effectRef idx="2">
+            <a:schemeClr val="accent1"/>
+          </a:effectRef>
+          <a:fontRef idx="minor">
+            <a:schemeClr val="lt1"/>
+          </a:fontRef>
+        </p:style>
+        <p:txBody>
+          <a:bodyPr rtlCol="0" anchor="ctr"/>
+          <a:lstStyle/>
+          <a:p>
+            <a:pPr algn="ctr"/>
+          </a:p>
+        </p:txBody>
+      </p:sp>
+      <p:sp>
+        <p:nvSpPr>
+          <p:cNvPr id="3" name="TextBox 2"/>
+          <p:cNvSpPr txBox="1"/>
+          <p:nvPr/>
+        </p:nvSpPr>
+        <p:spPr>
+          <a:xfrm>
+            <a:off x="11247120" y="6355080"/>
+            <a:ext cx="822960" cy="320040"/>
+          </a:xfrm>
+          <a:prstGeom prst="rect">
+            <a:avLst/>
+          </a:prstGeom>
+          <a:noFill/>
+        </p:spPr>
+        <p:txBody>
+          <a:bodyPr wrap="square">
+            <a:spAutoFit/>
+          </a:bodyPr>
+          <a:lstStyle/>
+          <a:p>
+            <a:pPr algn="r">
+              <a:spcAft>
+                <a:spcPts val="800"/>
+              </a:spcAft>
+            </a:pPr>
+            <a:r>
+              <a:rPr sz="1000" b="0">
+                <a:solidFill>
+                  <a:srgbClr val="566666"/>
+                </a:solidFill>
+                <a:latin typeface="微软雅黑"/>
+              </a:rPr>
+              <a:t>22</a:t>
             </a:r>
           </a:p>
         </p:txBody>
